--- a/板块二进度说明/板块二_研究进展与接口设计汇报_统一口径版.pptx
+++ b/板块二进度说明/板块二_研究进展与接口设计汇报_统一口径版.pptx
@@ -11,11 +11,18 @@
     <p:sldId id="260" r:id="rId12"/>
     <p:sldId id="274" r:id="rId26"/>
     <p:sldId id="275" r:id="rId27"/>
+    <p:sldId id="264" r:id="rId16"/>
+    <p:sldId id="277" r:id="rId20"/>
+    <p:sldId id="278" r:id="rId18"/>
     <p:sldId id="276" r:id="rId28"/>
-    <p:sldId id="264" r:id="rId16"/>
+    <p:sldId id="279" r:id="rId22"/>
+    <p:sldId id="280" r:id="rId17"/>
+    <p:sldId id="281" r:id="rId24"/>
+    <p:sldId id="282" r:id="rId25"/>
     <p:sldId id="263" r:id="rId15"/>
     <p:sldId id="267" r:id="rId19"/>
     <p:sldId id="269" r:id="rId21"/>
+    <p:sldId id="283" r:id="rId14"/>
     <p:sldId id="271" r:id="rId23"/>
   </p:sldIdLst>
   <p:sldSz cx="12191695" cy="6858000" type="screen4x3"/>
@@ -654,6 +661,496 @@
           <a:p>
             <a:r>
               <a:t>接口依据《功能逻辑分析模块接口需求.md》第2、3项及此前核对的服务器代码版本f2d98e5。逻辑架构生成对外路由尚需接入；输入补全已有候选预览和人工确认基础，尚不能等同于完整多轮对话。only_check为MD需求，核对版本未支持。暂定的是否启用补全选项与only_check不同，最终报文仍待确定。两个对外接口尚未完全完成，功能逻辑架构字段正在与物理架构组件选型及连接布局模块协商。</a:t>
+            </a:r>
+          </a:p>
+        </p:txBody>
+      </p:sp>
+      <p:sp>
+        <p:nvSpPr>
+          <p:cNvPr id="4" name="Slide Number Placeholder 3"/>
+          <p:cNvSpPr>
+            <a:spLocks noGrp="1"/>
+          </p:cNvSpPr>
+          <p:nvPr>
+            <p:ph type="sldNum" idx="5" sz="quarter"/>
+          </p:nvPr>
+        </p:nvSpPr>
+        <p:spPr/>
+      </p:sp>
+    </p:spTree>
+  </p:cSld>
+  <p:clrMapOvr>
+    <a:masterClrMapping/>
+  </p:clrMapOvr>
+</p:notes>
+</file>
+
+<file path=ppt/notesSlides/notesSlide12.xml><?xml version="1.0" encoding="utf-8"?>
+<p:notes xmlns:a="http://schemas.openxmlformats.org/drawingml/2006/main" xmlns:p="http://schemas.openxmlformats.org/presentationml/2006/main" xmlns:r="http://schemas.openxmlformats.org/officeDocument/2006/relationships">
+  <p:cSld>
+    <p:spTree>
+      <p:nvGrpSpPr>
+        <p:cNvPr id="1" name=""/>
+        <p:cNvGrpSpPr/>
+        <p:nvPr/>
+      </p:nvGrpSpPr>
+      <p:grpSpPr>
+        <a:xfrm>
+          <a:off x="0" y="0"/>
+          <a:ext cx="0" cy="0"/>
+          <a:chOff x="0" y="0"/>
+          <a:chExt cx="0" cy="0"/>
+        </a:xfrm>
+      </p:grpSpPr>
+      <p:sp>
+        <p:nvSpPr>
+          <p:cNvPr id="2" name="Slide Image Placeholder 1"/>
+          <p:cNvSpPr>
+            <a:spLocks noGrp="1"/>
+          </p:cNvSpPr>
+          <p:nvPr>
+            <p:ph type="sldImg" idx="2"/>
+          </p:nvPr>
+        </p:nvSpPr>
+        <p:spPr/>
+      </p:sp>
+      <p:sp>
+        <p:nvSpPr>
+          <p:cNvPr id="3" name="Notes Placeholder 2"/>
+          <p:cNvSpPr>
+            <a:spLocks noGrp="1"/>
+          </p:cNvSpPr>
+          <p:nvPr>
+            <p:ph type="body" idx="3" sz="quarter"/>
+          </p:nvPr>
+        </p:nvSpPr>
+        <p:spPr/>
+        <p:txBody>
+          <a:bodyPr/>
+          <a:lstStyle/>
+          <a:p>
+            <a:r>
+              <a:t>两张代码截图直接取自上传Word的核心代码2，完整保留，未重新执行程序。</a:t>
+            </a:r>
+          </a:p>
+        </p:txBody>
+      </p:sp>
+      <p:sp>
+        <p:nvSpPr>
+          <p:cNvPr id="4" name="Slide Number Placeholder 3"/>
+          <p:cNvSpPr>
+            <a:spLocks noGrp="1"/>
+          </p:cNvSpPr>
+          <p:nvPr>
+            <p:ph type="sldNum" idx="5" sz="quarter"/>
+          </p:nvPr>
+        </p:nvSpPr>
+        <p:spPr/>
+      </p:sp>
+    </p:spTree>
+  </p:cSld>
+  <p:clrMapOvr>
+    <a:masterClrMapping/>
+  </p:clrMapOvr>
+</p:notes>
+</file>
+
+<file path=ppt/notesSlides/notesSlide13.xml><?xml version="1.0" encoding="utf-8"?>
+<p:notes xmlns:a="http://schemas.openxmlformats.org/drawingml/2006/main" xmlns:p="http://schemas.openxmlformats.org/presentationml/2006/main" xmlns:r="http://schemas.openxmlformats.org/officeDocument/2006/relationships">
+  <p:cSld>
+    <p:spTree>
+      <p:nvGrpSpPr>
+        <p:cNvPr id="1" name=""/>
+        <p:cNvGrpSpPr/>
+        <p:nvPr/>
+      </p:nvGrpSpPr>
+      <p:grpSpPr>
+        <a:xfrm>
+          <a:off x="0" y="0"/>
+          <a:ext cx="0" cy="0"/>
+          <a:chOff x="0" y="0"/>
+          <a:chExt cx="0" cy="0"/>
+        </a:xfrm>
+      </p:grpSpPr>
+      <p:sp>
+        <p:nvSpPr>
+          <p:cNvPr id="2" name="Slide Image Placeholder 1"/>
+          <p:cNvSpPr>
+            <a:spLocks noGrp="1"/>
+          </p:cNvSpPr>
+          <p:nvPr>
+            <p:ph type="sldImg" idx="2"/>
+          </p:nvPr>
+        </p:nvSpPr>
+        <p:spPr/>
+      </p:sp>
+      <p:sp>
+        <p:nvSpPr>
+          <p:cNvPr id="3" name="Notes Placeholder 2"/>
+          <p:cNvSpPr>
+            <a:spLocks noGrp="1"/>
+          </p:cNvSpPr>
+          <p:nvPr>
+            <p:ph type="body" idx="3" sz="quarter"/>
+          </p:nvPr>
+        </p:nvSpPr>
+        <p:spPr/>
+        <p:txBody>
+          <a:bodyPr/>
+          <a:lstStyle/>
+          <a:p>
+            <a:r>
+              <a:t>截图p61完整嵌入。原始截图右缘已有截断，PPT不补造被截断内容；同批案例完整字段需查看原JSON/Excel。</a:t>
+            </a:r>
+          </a:p>
+        </p:txBody>
+      </p:sp>
+      <p:sp>
+        <p:nvSpPr>
+          <p:cNvPr id="4" name="Slide Number Placeholder 3"/>
+          <p:cNvSpPr>
+            <a:spLocks noGrp="1"/>
+          </p:cNvSpPr>
+          <p:nvPr>
+            <p:ph type="sldNum" idx="5" sz="quarter"/>
+          </p:nvPr>
+        </p:nvSpPr>
+        <p:spPr/>
+      </p:sp>
+    </p:spTree>
+  </p:cSld>
+  <p:clrMapOvr>
+    <a:masterClrMapping/>
+  </p:clrMapOvr>
+</p:notes>
+</file>
+
+<file path=ppt/notesSlides/notesSlide14.xml><?xml version="1.0" encoding="utf-8"?>
+<p:notes xmlns:a="http://schemas.openxmlformats.org/drawingml/2006/main" xmlns:p="http://schemas.openxmlformats.org/presentationml/2006/main" xmlns:r="http://schemas.openxmlformats.org/officeDocument/2006/relationships">
+  <p:cSld>
+    <p:spTree>
+      <p:nvGrpSpPr>
+        <p:cNvPr id="1" name=""/>
+        <p:cNvGrpSpPr/>
+        <p:nvPr/>
+      </p:nvGrpSpPr>
+      <p:grpSpPr>
+        <a:xfrm>
+          <a:off x="0" y="0"/>
+          <a:ext cx="0" cy="0"/>
+          <a:chOff x="0" y="0"/>
+          <a:chExt cx="0" cy="0"/>
+        </a:xfrm>
+      </p:grpSpPr>
+      <p:sp>
+        <p:nvSpPr>
+          <p:cNvPr id="2" name="Slide Image Placeholder 1"/>
+          <p:cNvSpPr>
+            <a:spLocks noGrp="1"/>
+          </p:cNvSpPr>
+          <p:nvPr>
+            <p:ph type="sldImg" idx="2"/>
+          </p:nvPr>
+        </p:nvSpPr>
+        <p:spPr/>
+      </p:sp>
+      <p:sp>
+        <p:nvSpPr>
+          <p:cNvPr id="3" name="Notes Placeholder 2"/>
+          <p:cNvSpPr>
+            <a:spLocks noGrp="1"/>
+          </p:cNvSpPr>
+          <p:nvPr>
+            <p:ph type="body" idx="3" sz="quarter"/>
+          </p:nvPr>
+        </p:nvSpPr>
+        <p:spPr/>
+        <p:txBody>
+          <a:bodyPr/>
+          <a:lstStyle/>
+          <a:p>
+            <a:r>
+              <a:t>截图p66直接取自上传Word，与此前核心代码3对应。展示结果不代表类型、单位兼容性已经完成工程验证。</a:t>
+            </a:r>
+          </a:p>
+        </p:txBody>
+      </p:sp>
+      <p:sp>
+        <p:nvSpPr>
+          <p:cNvPr id="4" name="Slide Number Placeholder 3"/>
+          <p:cNvSpPr>
+            <a:spLocks noGrp="1"/>
+          </p:cNvSpPr>
+          <p:nvPr>
+            <p:ph type="sldNum" idx="5" sz="quarter"/>
+          </p:nvPr>
+        </p:nvSpPr>
+        <p:spPr/>
+      </p:sp>
+    </p:spTree>
+  </p:cSld>
+  <p:clrMapOvr>
+    <a:masterClrMapping/>
+  </p:clrMapOvr>
+</p:notes>
+</file>
+
+<file path=ppt/notesSlides/notesSlide15.xml><?xml version="1.0" encoding="utf-8"?>
+<p:notes xmlns:a="http://schemas.openxmlformats.org/drawingml/2006/main" xmlns:p="http://schemas.openxmlformats.org/presentationml/2006/main" xmlns:r="http://schemas.openxmlformats.org/officeDocument/2006/relationships">
+  <p:cSld>
+    <p:spTree>
+      <p:nvGrpSpPr>
+        <p:cNvPr id="1" name=""/>
+        <p:cNvGrpSpPr/>
+        <p:nvPr/>
+      </p:nvGrpSpPr>
+      <p:grpSpPr>
+        <a:xfrm>
+          <a:off x="0" y="0"/>
+          <a:ext cx="0" cy="0"/>
+          <a:chOff x="0" y="0"/>
+          <a:chExt cx="0" cy="0"/>
+        </a:xfrm>
+      </p:grpSpPr>
+      <p:sp>
+        <p:nvSpPr>
+          <p:cNvPr id="2" name="Slide Image Placeholder 1"/>
+          <p:cNvSpPr>
+            <a:spLocks noGrp="1"/>
+          </p:cNvSpPr>
+          <p:nvPr>
+            <p:ph type="sldImg" idx="2"/>
+          </p:nvPr>
+        </p:nvSpPr>
+        <p:spPr/>
+      </p:sp>
+      <p:sp>
+        <p:nvSpPr>
+          <p:cNvPr id="3" name="Notes Placeholder 2"/>
+          <p:cNvSpPr>
+            <a:spLocks noGrp="1"/>
+          </p:cNvSpPr>
+          <p:nvPr>
+            <p:ph type="body" idx="3" sz="quarter"/>
+          </p:nvPr>
+        </p:nvSpPr>
+        <p:spPr/>
+        <p:txBody>
+          <a:bodyPr/>
+          <a:lstStyle/>
+          <a:p>
+            <a:r>
+              <a:t>上传Word核心代码4中的Excel输出截图，保持原图内容不变。</a:t>
+            </a:r>
+          </a:p>
+        </p:txBody>
+      </p:sp>
+      <p:sp>
+        <p:nvSpPr>
+          <p:cNvPr id="4" name="Slide Number Placeholder 3"/>
+          <p:cNvSpPr>
+            <a:spLocks noGrp="1"/>
+          </p:cNvSpPr>
+          <p:nvPr>
+            <p:ph type="sldNum" idx="5" sz="quarter"/>
+          </p:nvPr>
+        </p:nvSpPr>
+        <p:spPr/>
+      </p:sp>
+    </p:spTree>
+  </p:cSld>
+  <p:clrMapOvr>
+    <a:masterClrMapping/>
+  </p:clrMapOvr>
+</p:notes>
+</file>
+
+<file path=ppt/notesSlides/notesSlide16.xml><?xml version="1.0" encoding="utf-8"?>
+<p:notes xmlns:a="http://schemas.openxmlformats.org/drawingml/2006/main" xmlns:p="http://schemas.openxmlformats.org/presentationml/2006/main" xmlns:r="http://schemas.openxmlformats.org/officeDocument/2006/relationships">
+  <p:cSld>
+    <p:spTree>
+      <p:nvGrpSpPr>
+        <p:cNvPr id="1" name=""/>
+        <p:cNvGrpSpPr/>
+        <p:nvPr/>
+      </p:nvGrpSpPr>
+      <p:grpSpPr>
+        <a:xfrm>
+          <a:off x="0" y="0"/>
+          <a:ext cx="0" cy="0"/>
+          <a:chOff x="0" y="0"/>
+          <a:chExt cx="0" cy="0"/>
+        </a:xfrm>
+      </p:grpSpPr>
+      <p:sp>
+        <p:nvSpPr>
+          <p:cNvPr id="2" name="Slide Image Placeholder 1"/>
+          <p:cNvSpPr>
+            <a:spLocks noGrp="1"/>
+          </p:cNvSpPr>
+          <p:nvPr>
+            <p:ph type="sldImg" idx="2"/>
+          </p:nvPr>
+        </p:nvSpPr>
+        <p:spPr/>
+      </p:sp>
+      <p:sp>
+        <p:nvSpPr>
+          <p:cNvPr id="3" name="Notes Placeholder 2"/>
+          <p:cNvSpPr>
+            <a:spLocks noGrp="1"/>
+          </p:cNvSpPr>
+          <p:nvPr>
+            <p:ph type="body" idx="3" sz="quarter"/>
+          </p:nvPr>
+        </p:nvSpPr>
+        <p:spPr/>
+        <p:txBody>
+          <a:bodyPr/>
+          <a:lstStyle/>
+          <a:p>
+            <a:r>
+              <a:t>上传Word核心代码4中的JSON输出截图，保持原图内容不变。</a:t>
+            </a:r>
+          </a:p>
+        </p:txBody>
+      </p:sp>
+      <p:sp>
+        <p:nvSpPr>
+          <p:cNvPr id="4" name="Slide Number Placeholder 3"/>
+          <p:cNvSpPr>
+            <a:spLocks noGrp="1"/>
+          </p:cNvSpPr>
+          <p:nvPr>
+            <p:ph type="sldNum" idx="5" sz="quarter"/>
+          </p:nvPr>
+        </p:nvSpPr>
+        <p:spPr/>
+      </p:sp>
+    </p:spTree>
+  </p:cSld>
+  <p:clrMapOvr>
+    <a:masterClrMapping/>
+  </p:clrMapOvr>
+</p:notes>
+</file>
+
+<file path=ppt/notesSlides/notesSlide17.xml><?xml version="1.0" encoding="utf-8"?>
+<p:notes xmlns:a="http://schemas.openxmlformats.org/drawingml/2006/main" xmlns:p="http://schemas.openxmlformats.org/presentationml/2006/main" xmlns:r="http://schemas.openxmlformats.org/officeDocument/2006/relationships">
+  <p:cSld>
+    <p:spTree>
+      <p:nvGrpSpPr>
+        <p:cNvPr id="1" name=""/>
+        <p:cNvGrpSpPr/>
+        <p:nvPr/>
+      </p:nvGrpSpPr>
+      <p:grpSpPr>
+        <a:xfrm>
+          <a:off x="0" y="0"/>
+          <a:ext cx="0" cy="0"/>
+          <a:chOff x="0" y="0"/>
+          <a:chExt cx="0" cy="0"/>
+        </a:xfrm>
+      </p:grpSpPr>
+      <p:sp>
+        <p:nvSpPr>
+          <p:cNvPr id="2" name="Slide Image Placeholder 1"/>
+          <p:cNvSpPr>
+            <a:spLocks noGrp="1"/>
+          </p:cNvSpPr>
+          <p:nvPr>
+            <p:ph type="sldImg" idx="2"/>
+          </p:nvPr>
+        </p:nvSpPr>
+        <p:spPr/>
+      </p:sp>
+      <p:sp>
+        <p:nvSpPr>
+          <p:cNvPr id="3" name="Notes Placeholder 2"/>
+          <p:cNvSpPr>
+            <a:spLocks noGrp="1"/>
+          </p:cNvSpPr>
+          <p:nvPr>
+            <p:ph type="body" idx="3" sz="quarter"/>
+          </p:nvPr>
+        </p:nvSpPr>
+        <p:spPr/>
+        <p:txBody>
+          <a:bodyPr/>
+          <a:lstStyle/>
+          <a:p>
+            <a:r>
+              <a:t>截图p71为上传Word的运行输出文件清单，不是本次重新运行或验证文件内容。</a:t>
+            </a:r>
+          </a:p>
+        </p:txBody>
+      </p:sp>
+      <p:sp>
+        <p:nvSpPr>
+          <p:cNvPr id="4" name="Slide Number Placeholder 3"/>
+          <p:cNvSpPr>
+            <a:spLocks noGrp="1"/>
+          </p:cNvSpPr>
+          <p:nvPr>
+            <p:ph type="sldNum" idx="5" sz="quarter"/>
+          </p:nvPr>
+        </p:nvSpPr>
+        <p:spPr/>
+      </p:sp>
+    </p:spTree>
+  </p:cSld>
+  <p:clrMapOvr>
+    <a:masterClrMapping/>
+  </p:clrMapOvr>
+</p:notes>
+</file>
+
+<file path=ppt/notesSlides/notesSlide18.xml><?xml version="1.0" encoding="utf-8"?>
+<p:notes xmlns:a="http://schemas.openxmlformats.org/drawingml/2006/main" xmlns:p="http://schemas.openxmlformats.org/presentationml/2006/main" xmlns:r="http://schemas.openxmlformats.org/officeDocument/2006/relationships">
+  <p:cSld>
+    <p:spTree>
+      <p:nvGrpSpPr>
+        <p:cNvPr id="1" name=""/>
+        <p:cNvGrpSpPr/>
+        <p:nvPr/>
+      </p:nvGrpSpPr>
+      <p:grpSpPr>
+        <a:xfrm>
+          <a:off x="0" y="0"/>
+          <a:ext cx="0" cy="0"/>
+          <a:chOff x="0" y="0"/>
+          <a:chExt cx="0" cy="0"/>
+        </a:xfrm>
+      </p:grpSpPr>
+      <p:sp>
+        <p:nvSpPr>
+          <p:cNvPr id="2" name="Slide Image Placeholder 1"/>
+          <p:cNvSpPr>
+            <a:spLocks noGrp="1"/>
+          </p:cNvSpPr>
+          <p:nvPr>
+            <p:ph type="sldImg" idx="2"/>
+          </p:nvPr>
+        </p:nvSpPr>
+        <p:spPr/>
+      </p:sp>
+      <p:sp>
+        <p:nvSpPr>
+          <p:cNvPr id="3" name="Notes Placeholder 2"/>
+          <p:cNvSpPr>
+            <a:spLocks noGrp="1"/>
+          </p:cNvSpPr>
+          <p:nvPr>
+            <p:ph type="body" idx="3" sz="quarter"/>
+          </p:nvPr>
+        </p:nvSpPr>
+        <p:spPr/>
+        <p:txBody>
+          <a:bodyPr/>
+          <a:lstStyle/>
+          <a:p>
+            <a:r>
+              <a:t>本页是接口设计伪代码，非已实现路由截图。生成接口及最终数据字段尚待接入/对齐。补全接口已有候选预览与确认基础；only_check为需求MD约定，核对服务器版本尚未支持。</a:t>
             </a:r>
           </a:p>
         </p:txBody>
@@ -4787,7 +5284,7 @@
               </a:defRPr>
             </a:pPr>
             <a:r>
-              <a:t>09 / 两个对外接口</a:t>
+              <a:t>两个对外接口</a:t>
             </a:r>
           </a:p>
         </p:txBody>
@@ -4947,7 +5444,7 @@
               </a:defRPr>
             </a:pPr>
             <a:r>
-              <a:t>10</a:t>
+              <a:t>16</a:t>
             </a:r>
           </a:p>
         </p:txBody>
@@ -5443,7 +5940,7 @@
               </a:defRPr>
             </a:pPr>
             <a:r>
-              <a:t>10 / 输入补全接口要求</a:t>
+              <a:t>输入补全接口要求</a:t>
             </a:r>
           </a:p>
         </p:txBody>
@@ -5603,7 +6100,7 @@
               </a:defRPr>
             </a:pPr>
             <a:r>
-              <a:t>11</a:t>
+              <a:t>17</a:t>
             </a:r>
           </a:p>
         </p:txBody>
@@ -6652,7 +7149,7 @@
               </a:defRPr>
             </a:pPr>
             <a:r>
-              <a:t>11 / 问题与后续计划</a:t>
+              <a:t>问题与后续计划</a:t>
             </a:r>
           </a:p>
         </p:txBody>
@@ -6812,7 +7309,7 @@
               </a:defRPr>
             </a:pPr>
             <a:r>
-              <a:t>12</a:t>
+              <a:t>19</a:t>
             </a:r>
           </a:p>
         </p:txBody>
@@ -8371,6 +8868,3428 @@
             </a:pPr>
             <a:r>
               <a:t>需讨论：功能簇结构、关系类型及方向、连接端点ID、来源字段、任务/版本与多轮增量规则。</a:t>
+            </a:r>
+          </a:p>
+        </p:txBody>
+      </p:sp>
+    </p:spTree>
+  </p:cSld>
+  <p:clrMapOvr>
+    <a:masterClrMapping/>
+  </p:clrMapOvr>
+</p:sld>
+</file>
+
+<file path=ppt/slides/slide13.xml><?xml version="1.0" encoding="utf-8"?>
+<p:sld xmlns:a="http://schemas.openxmlformats.org/drawingml/2006/main" xmlns:p="http://schemas.openxmlformats.org/presentationml/2006/main" xmlns:r="http://schemas.openxmlformats.org/officeDocument/2006/relationships">
+  <p:cSld>
+    <p:bg>
+      <p:bgPr>
+        <a:solidFill>
+          <a:srgbClr val="F5F7FA"/>
+        </a:solidFill>
+        <a:effectLst/>
+      </p:bgPr>
+    </p:bg>
+    <p:spTree>
+      <p:nvGrpSpPr>
+        <p:cNvPr id="1" name=""/>
+        <p:cNvGrpSpPr/>
+        <p:nvPr/>
+      </p:nvGrpSpPr>
+      <p:grpSpPr/>
+      <p:sp>
+        <p:nvSpPr>
+          <p:cNvPr id="2" name="Rectangle 1"/>
+          <p:cNvSpPr/>
+          <p:nvPr/>
+        </p:nvSpPr>
+        <p:spPr>
+          <a:xfrm>
+            <a:off x="0" y="0"/>
+            <a:ext cx="12191695" cy="91440"/>
+          </a:xfrm>
+          <a:prstGeom prst="rect">
+            <a:avLst/>
+          </a:prstGeom>
+          <a:solidFill>
+            <a:srgbClr val="007F87"/>
+          </a:solidFill>
+          <a:ln>
+            <a:noFill/>
+          </a:ln>
+        </p:spPr>
+        <p:style>
+          <a:lnRef idx="1">
+            <a:schemeClr val="accent1"/>
+          </a:lnRef>
+          <a:fillRef idx="3">
+            <a:schemeClr val="accent1"/>
+          </a:fillRef>
+          <a:effectRef idx="2">
+            <a:schemeClr val="accent1"/>
+          </a:effectRef>
+          <a:fontRef idx="minor">
+            <a:schemeClr val="lt1"/>
+          </a:fontRef>
+        </p:style>
+        <p:txBody>
+          <a:bodyPr rtlCol="0" anchor="ctr"/>
+          <a:lstStyle/>
+          <a:p>
+            <a:pPr algn="ctr"/>
+          </a:p>
+        </p:txBody>
+      </p:sp>
+      <p:sp>
+        <p:nvSpPr>
+          <p:cNvPr id="3" name="TextBox 2"/>
+          <p:cNvSpPr txBox="1"/>
+          <p:nvPr/>
+        </p:nvSpPr>
+        <p:spPr>
+          <a:xfrm>
+            <a:off x="548640" y="274320"/>
+            <a:ext cx="10058400" cy="256032"/>
+          </a:xfrm>
+          <a:prstGeom prst="rect">
+            <a:avLst/>
+          </a:prstGeom>
+          <a:noFill/>
+        </p:spPr>
+        <p:txBody>
+          <a:bodyPr wrap="square" lIns="18288" rIns="18288" tIns="0" bIns="0">
+            <a:spAutoFit/>
+          </a:bodyPr>
+          <a:lstStyle/>
+          <a:p>
+            <a:pPr>
+              <a:spcAft>
+                <a:spcPts val="800"/>
+              </a:spcAft>
+              <a:defRPr sz="1100" b="1">
+                <a:solidFill>
+                  <a:srgbClr val="007F87"/>
+                </a:solidFill>
+                <a:latin typeface="Microsoft YaHei"/>
+              </a:defRPr>
+            </a:pPr>
+            <a:r>
+              <a:t>核心代码 / MBSE_app</a:t>
+            </a:r>
+          </a:p>
+        </p:txBody>
+      </p:sp>
+      <p:sp>
+        <p:nvSpPr>
+          <p:cNvPr id="4" name="TextBox 3"/>
+          <p:cNvSpPr txBox="1"/>
+          <p:nvPr/>
+        </p:nvSpPr>
+        <p:spPr>
+          <a:xfrm>
+            <a:off x="548640" y="758952"/>
+            <a:ext cx="11064240" cy="594360"/>
+          </a:xfrm>
+          <a:prstGeom prst="rect">
+            <a:avLst/>
+          </a:prstGeom>
+          <a:noFill/>
+        </p:spPr>
+        <p:txBody>
+          <a:bodyPr wrap="square" lIns="18288" rIns="18288" tIns="0" bIns="0">
+            <a:spAutoFit/>
+          </a:bodyPr>
+          <a:lstStyle/>
+          <a:p>
+            <a:pPr>
+              <a:spcAft>
+                <a:spcPts val="800"/>
+              </a:spcAft>
+              <a:defRPr sz="2900" b="1">
+                <a:solidFill>
+                  <a:srgbClr val="17324D"/>
+                </a:solidFill>
+                <a:latin typeface="Microsoft YaHei"/>
+              </a:defRPr>
+            </a:pPr>
+            <a:r>
+              <a:t>关系处理核心：有效端点、标准关系与所属功能簇</a:t>
+            </a:r>
+          </a:p>
+        </p:txBody>
+      </p:sp>
+      <p:sp>
+        <p:nvSpPr>
+          <p:cNvPr id="5" name="Rectangle 4"/>
+          <p:cNvSpPr/>
+          <p:nvPr/>
+        </p:nvSpPr>
+        <p:spPr>
+          <a:xfrm>
+            <a:off x="548640" y="6446520"/>
+            <a:ext cx="11064240" cy="10972"/>
+          </a:xfrm>
+          <a:prstGeom prst="rect">
+            <a:avLst/>
+          </a:prstGeom>
+          <a:solidFill>
+            <a:srgbClr val="DCE5ED"/>
+          </a:solidFill>
+          <a:ln>
+            <a:noFill/>
+          </a:ln>
+        </p:spPr>
+        <p:style>
+          <a:lnRef idx="1">
+            <a:schemeClr val="accent1"/>
+          </a:lnRef>
+          <a:fillRef idx="3">
+            <a:schemeClr val="accent1"/>
+          </a:fillRef>
+          <a:effectRef idx="2">
+            <a:schemeClr val="accent1"/>
+          </a:effectRef>
+          <a:fontRef idx="minor">
+            <a:schemeClr val="lt1"/>
+          </a:fontRef>
+        </p:style>
+        <p:txBody>
+          <a:bodyPr rtlCol="0" anchor="ctr"/>
+          <a:lstStyle/>
+          <a:p>
+            <a:pPr algn="ctr"/>
+          </a:p>
+        </p:txBody>
+      </p:sp>
+      <p:sp>
+        <p:nvSpPr>
+          <p:cNvPr id="6" name="TextBox 5"/>
+          <p:cNvSpPr txBox="1"/>
+          <p:nvPr/>
+        </p:nvSpPr>
+        <p:spPr>
+          <a:xfrm>
+            <a:off x="548640" y="6537960"/>
+            <a:ext cx="9144000" cy="182880"/>
+          </a:xfrm>
+          <a:prstGeom prst="rect">
+            <a:avLst/>
+          </a:prstGeom>
+          <a:noFill/>
+        </p:spPr>
+        <p:txBody>
+          <a:bodyPr wrap="square" lIns="18288" rIns="18288" tIns="0" bIns="0">
+            <a:spAutoFit/>
+          </a:bodyPr>
+          <a:lstStyle/>
+          <a:p>
+            <a:pPr>
+              <a:spcAft>
+                <a:spcPts val="800"/>
+              </a:spcAft>
+              <a:defRPr sz="900" b="0">
+                <a:solidFill>
+                  <a:srgbClr val="60758A"/>
+                </a:solidFill>
+                <a:latin typeface="Microsoft YaHei"/>
+              </a:defRPr>
+            </a:pPr>
+            <a:r>
+              <a:t>板块二  ·  功能逻辑架构生成研究汇报</a:t>
+            </a:r>
+          </a:p>
+        </p:txBody>
+      </p:sp>
+      <p:sp>
+        <p:nvSpPr>
+          <p:cNvPr id="7" name="TextBox 6"/>
+          <p:cNvSpPr txBox="1"/>
+          <p:nvPr/>
+        </p:nvSpPr>
+        <p:spPr>
+          <a:xfrm>
+            <a:off x="10972800" y="6519672"/>
+            <a:ext cx="640080" cy="228600"/>
+          </a:xfrm>
+          <a:prstGeom prst="rect">
+            <a:avLst/>
+          </a:prstGeom>
+          <a:noFill/>
+        </p:spPr>
+        <p:txBody>
+          <a:bodyPr wrap="square" lIns="18288" rIns="18288" tIns="0" bIns="0">
+            <a:spAutoFit/>
+          </a:bodyPr>
+          <a:lstStyle/>
+          <a:p>
+            <a:pPr algn="r">
+              <a:spcAft>
+                <a:spcPts val="800"/>
+              </a:spcAft>
+              <a:defRPr sz="1000" b="0">
+                <a:solidFill>
+                  <a:srgbClr val="60758A"/>
+                </a:solidFill>
+                <a:latin typeface="Microsoft YaHei"/>
+              </a:defRPr>
+            </a:pPr>
+            <a:r>
+              <a:t>08</a:t>
+            </a:r>
+          </a:p>
+        </p:txBody>
+      </p:sp>
+      <p:sp>
+        <p:nvSpPr>
+          <p:cNvPr id="8" name="TextBox 7"/>
+          <p:cNvSpPr txBox="1"/>
+          <p:nvPr/>
+        </p:nvSpPr>
+        <p:spPr>
+          <a:xfrm>
+            <a:off x="685800" y="1645920"/>
+            <a:ext cx="5212080" cy="320040"/>
+          </a:xfrm>
+          <a:prstGeom prst="rect">
+            <a:avLst/>
+          </a:prstGeom>
+          <a:noFill/>
+        </p:spPr>
+        <p:txBody>
+          <a:bodyPr wrap="square" lIns="18288" rIns="18288" tIns="0" bIns="0">
+            <a:spAutoFit/>
+          </a:bodyPr>
+          <a:lstStyle/>
+          <a:p>
+            <a:pPr>
+              <a:spcAft>
+                <a:spcPts val="800"/>
+              </a:spcAft>
+              <a:defRPr sz="1900" b="1">
+                <a:solidFill>
+                  <a:srgbClr val="17324D"/>
+                </a:solidFill>
+                <a:latin typeface="Microsoft YaHei"/>
+              </a:defRPr>
+            </a:pPr>
+            <a:r>
+              <a:t>端点过滤与关系类型处理</a:t>
+            </a:r>
+          </a:p>
+        </p:txBody>
+      </p:sp>
+      <p:sp>
+        <p:nvSpPr>
+          <p:cNvPr id="9" name="TextBox 8"/>
+          <p:cNvSpPr txBox="1"/>
+          <p:nvPr/>
+        </p:nvSpPr>
+        <p:spPr>
+          <a:xfrm>
+            <a:off x="6355080" y="1645920"/>
+            <a:ext cx="5212080" cy="320040"/>
+          </a:xfrm>
+          <a:prstGeom prst="rect">
+            <a:avLst/>
+          </a:prstGeom>
+          <a:noFill/>
+        </p:spPr>
+        <p:txBody>
+          <a:bodyPr wrap="square" lIns="18288" rIns="18288" tIns="0" bIns="0">
+            <a:spAutoFit/>
+          </a:bodyPr>
+          <a:lstStyle/>
+          <a:p>
+            <a:pPr>
+              <a:spcAft>
+                <a:spcPts val="800"/>
+              </a:spcAft>
+              <a:defRPr sz="1900" b="1">
+                <a:solidFill>
+                  <a:srgbClr val="17324D"/>
+                </a:solidFill>
+                <a:latin typeface="Microsoft YaHei"/>
+              </a:defRPr>
+            </a:pPr>
+            <a:r>
+              <a:t>源/目标簇关联与记录组织</a:t>
+            </a:r>
+          </a:p>
+        </p:txBody>
+      </p:sp>
+      <p:sp>
+        <p:nvSpPr>
+          <p:cNvPr id="10" name="Rounded Rectangle 9"/>
+          <p:cNvSpPr/>
+          <p:nvPr/>
+        </p:nvSpPr>
+        <p:spPr>
+          <a:xfrm>
+            <a:off x="594360" y="2057400"/>
+            <a:ext cx="5349240" cy="3611880"/>
+          </a:xfrm>
+          <a:prstGeom prst="roundRect">
+            <a:avLst/>
+          </a:prstGeom>
+          <a:solidFill>
+            <a:srgbClr val="FFFFFF"/>
+          </a:solidFill>
+          <a:ln>
+            <a:noFill/>
+          </a:ln>
+        </p:spPr>
+        <p:style>
+          <a:lnRef idx="1">
+            <a:schemeClr val="accent1"/>
+          </a:lnRef>
+          <a:fillRef idx="3">
+            <a:schemeClr val="accent1"/>
+          </a:fillRef>
+          <a:effectRef idx="2">
+            <a:schemeClr val="accent1"/>
+          </a:effectRef>
+          <a:fontRef idx="minor">
+            <a:schemeClr val="lt1"/>
+          </a:fontRef>
+        </p:style>
+        <p:txBody>
+          <a:bodyPr rtlCol="0" anchor="ctr"/>
+          <a:lstStyle/>
+          <a:p>
+            <a:pPr algn="ctr"/>
+          </a:p>
+        </p:txBody>
+      </p:sp>
+      <p:pic>
+        <p:nvPicPr>
+          <p:cNvPr id="11" name="Picture 10" descr="p58.png"/>
+          <p:cNvPicPr>
+            <a:picLocks noChangeAspect="1"/>
+          </p:cNvPicPr>
+          <p:nvPr/>
+        </p:nvPicPr>
+        <p:blipFill>
+          <a:blip r:embed="rId3"/>
+          <a:stretch>
+            <a:fillRect/>
+          </a:stretch>
+        </p:blipFill>
+        <p:spPr>
+          <a:xfrm>
+            <a:off x="1307507" y="2148840"/>
+            <a:ext cx="3922944" cy="3383280"/>
+          </a:xfrm>
+          <a:prstGeom prst="rect">
+            <a:avLst/>
+          </a:prstGeom>
+        </p:spPr>
+      </p:pic>
+      <p:sp>
+        <p:nvSpPr>
+          <p:cNvPr id="12" name="Rounded Rectangle 11"/>
+          <p:cNvSpPr/>
+          <p:nvPr/>
+        </p:nvSpPr>
+        <p:spPr>
+          <a:xfrm>
+            <a:off x="6217920" y="2057400"/>
+            <a:ext cx="5349240" cy="3611880"/>
+          </a:xfrm>
+          <a:prstGeom prst="roundRect">
+            <a:avLst/>
+          </a:prstGeom>
+          <a:solidFill>
+            <a:srgbClr val="FFFFFF"/>
+          </a:solidFill>
+          <a:ln>
+            <a:noFill/>
+          </a:ln>
+        </p:spPr>
+        <p:style>
+          <a:lnRef idx="1">
+            <a:schemeClr val="accent1"/>
+          </a:lnRef>
+          <a:fillRef idx="3">
+            <a:schemeClr val="accent1"/>
+          </a:fillRef>
+          <a:effectRef idx="2">
+            <a:schemeClr val="accent1"/>
+          </a:effectRef>
+          <a:fontRef idx="minor">
+            <a:schemeClr val="lt1"/>
+          </a:fontRef>
+        </p:style>
+        <p:txBody>
+          <a:bodyPr rtlCol="0" anchor="ctr"/>
+          <a:lstStyle/>
+          <a:p>
+            <a:pPr algn="ctr"/>
+          </a:p>
+        </p:txBody>
+      </p:sp>
+      <p:pic>
+        <p:nvPicPr>
+          <p:cNvPr id="13" name="Picture 12" descr="p59.png"/>
+          <p:cNvPicPr>
+            <a:picLocks noChangeAspect="1"/>
+          </p:cNvPicPr>
+          <p:nvPr/>
+        </p:nvPicPr>
+        <p:blipFill>
+          <a:blip r:embed="rId4"/>
+          <a:stretch>
+            <a:fillRect/>
+          </a:stretch>
+        </p:blipFill>
+        <p:spPr>
+          <a:xfrm>
+            <a:off x="6355080" y="2237356"/>
+            <a:ext cx="5074920" cy="3206247"/>
+          </a:xfrm>
+          <a:prstGeom prst="rect">
+            <a:avLst/>
+          </a:prstGeom>
+        </p:spPr>
+      </p:pic>
+      <p:sp>
+        <p:nvSpPr>
+          <p:cNvPr id="14" name="Rounded Rectangle 13"/>
+          <p:cNvSpPr/>
+          <p:nvPr/>
+        </p:nvSpPr>
+        <p:spPr>
+          <a:xfrm>
+            <a:off x="594360" y="5806440"/>
+            <a:ext cx="10972800" cy="429768"/>
+          </a:xfrm>
+          <a:prstGeom prst="roundRect">
+            <a:avLst/>
+          </a:prstGeom>
+          <a:solidFill>
+            <a:srgbClr val="E7F3F2"/>
+          </a:solidFill>
+          <a:ln>
+            <a:noFill/>
+          </a:ln>
+        </p:spPr>
+        <p:style>
+          <a:lnRef idx="1">
+            <a:schemeClr val="accent1"/>
+          </a:lnRef>
+          <a:fillRef idx="3">
+            <a:schemeClr val="accent1"/>
+          </a:fillRef>
+          <a:effectRef idx="2">
+            <a:schemeClr val="accent1"/>
+          </a:effectRef>
+          <a:fontRef idx="minor">
+            <a:schemeClr val="lt1"/>
+          </a:fontRef>
+        </p:style>
+        <p:txBody>
+          <a:bodyPr rtlCol="0" anchor="ctr"/>
+          <a:lstStyle/>
+          <a:p>
+            <a:pPr algn="ctr"/>
+          </a:p>
+        </p:txBody>
+      </p:sp>
+      <p:sp>
+        <p:nvSpPr>
+          <p:cNvPr id="15" name="TextBox 14"/>
+          <p:cNvSpPr txBox="1"/>
+          <p:nvPr/>
+        </p:nvSpPr>
+        <p:spPr>
+          <a:xfrm>
+            <a:off x="777240" y="5888736"/>
+            <a:ext cx="10607040" cy="256032"/>
+          </a:xfrm>
+          <a:prstGeom prst="rect">
+            <a:avLst/>
+          </a:prstGeom>
+          <a:noFill/>
+        </p:spPr>
+        <p:txBody>
+          <a:bodyPr wrap="square" lIns="18288" rIns="18288" tIns="0" bIns="0">
+            <a:spAutoFit/>
+          </a:bodyPr>
+          <a:lstStyle/>
+          <a:p>
+            <a:pPr>
+              <a:spcAft>
+                <a:spcPts val="800"/>
+              </a:spcAft>
+              <a:defRPr sz="1400" b="0">
+                <a:solidFill>
+                  <a:srgbClr val="007F87"/>
+                </a:solidFill>
+                <a:latin typeface="Microsoft YaHei"/>
+              </a:defRPr>
+            </a:pPr>
+            <a:r>
+              <a:t>原型以前置校验保证引用有效；生成阶段保留端点过滤，关系记录携带簇归属与证据。</a:t>
+            </a:r>
+          </a:p>
+        </p:txBody>
+      </p:sp>
+    </p:spTree>
+  </p:cSld>
+  <p:clrMapOvr>
+    <a:masterClrMapping/>
+  </p:clrMapOvr>
+</p:sld>
+</file>
+
+<file path=ppt/slides/slide14.xml><?xml version="1.0" encoding="utf-8"?>
+<p:sld xmlns:a="http://schemas.openxmlformats.org/drawingml/2006/main" xmlns:p="http://schemas.openxmlformats.org/presentationml/2006/main" xmlns:r="http://schemas.openxmlformats.org/officeDocument/2006/relationships">
+  <p:cSld>
+    <p:bg>
+      <p:bgPr>
+        <a:solidFill>
+          <a:srgbClr val="F5F7FA"/>
+        </a:solidFill>
+        <a:effectLst/>
+      </p:bgPr>
+    </p:bg>
+    <p:spTree>
+      <p:nvGrpSpPr>
+        <p:cNvPr id="1" name=""/>
+        <p:cNvGrpSpPr/>
+        <p:nvPr/>
+      </p:nvGrpSpPr>
+      <p:grpSpPr/>
+      <p:sp>
+        <p:nvSpPr>
+          <p:cNvPr id="2" name="Rectangle 1"/>
+          <p:cNvSpPr/>
+          <p:nvPr/>
+        </p:nvSpPr>
+        <p:spPr>
+          <a:xfrm>
+            <a:off x="0" y="0"/>
+            <a:ext cx="12191695" cy="91440"/>
+          </a:xfrm>
+          <a:prstGeom prst="rect">
+            <a:avLst/>
+          </a:prstGeom>
+          <a:solidFill>
+            <a:srgbClr val="007F87"/>
+          </a:solidFill>
+          <a:ln>
+            <a:noFill/>
+          </a:ln>
+        </p:spPr>
+        <p:style>
+          <a:lnRef idx="1">
+            <a:schemeClr val="accent1"/>
+          </a:lnRef>
+          <a:fillRef idx="3">
+            <a:schemeClr val="accent1"/>
+          </a:fillRef>
+          <a:effectRef idx="2">
+            <a:schemeClr val="accent1"/>
+          </a:effectRef>
+          <a:fontRef idx="minor">
+            <a:schemeClr val="lt1"/>
+          </a:fontRef>
+        </p:style>
+        <p:txBody>
+          <a:bodyPr rtlCol="0" anchor="ctr"/>
+          <a:lstStyle/>
+          <a:p>
+            <a:pPr algn="ctr"/>
+          </a:p>
+        </p:txBody>
+      </p:sp>
+      <p:sp>
+        <p:nvSpPr>
+          <p:cNvPr id="3" name="TextBox 2"/>
+          <p:cNvSpPr txBox="1"/>
+          <p:nvPr/>
+        </p:nvSpPr>
+        <p:spPr>
+          <a:xfrm>
+            <a:off x="548640" y="274320"/>
+            <a:ext cx="10058400" cy="256032"/>
+          </a:xfrm>
+          <a:prstGeom prst="rect">
+            <a:avLst/>
+          </a:prstGeom>
+          <a:noFill/>
+        </p:spPr>
+        <p:txBody>
+          <a:bodyPr wrap="square" lIns="18288" rIns="18288" tIns="0" bIns="0">
+            <a:spAutoFit/>
+          </a:bodyPr>
+          <a:lstStyle/>
+          <a:p>
+            <a:pPr>
+              <a:spcAft>
+                <a:spcPts val="800"/>
+              </a:spcAft>
+              <a:defRPr sz="1100" b="1">
+                <a:solidFill>
+                  <a:srgbClr val="007F87"/>
+                </a:solidFill>
+                <a:latin typeface="Microsoft YaHei"/>
+              </a:defRPr>
+            </a:pPr>
+            <a:r>
+              <a:t>运行截图 / MBSE_app</a:t>
+            </a:r>
+          </a:p>
+        </p:txBody>
+      </p:sp>
+      <p:sp>
+        <p:nvSpPr>
+          <p:cNvPr id="4" name="TextBox 3"/>
+          <p:cNvSpPr txBox="1"/>
+          <p:nvPr/>
+        </p:nvSpPr>
+        <p:spPr>
+          <a:xfrm>
+            <a:off x="548640" y="758952"/>
+            <a:ext cx="11064240" cy="594360"/>
+          </a:xfrm>
+          <a:prstGeom prst="rect">
+            <a:avLst/>
+          </a:prstGeom>
+          <a:noFill/>
+        </p:spPr>
+        <p:txBody>
+          <a:bodyPr wrap="square" lIns="18288" rIns="18288" tIns="0" bIns="0">
+            <a:spAutoFit/>
+          </a:bodyPr>
+          <a:lstStyle/>
+          <a:p>
+            <a:pPr>
+              <a:spcAft>
+                <a:spcPts val="800"/>
+              </a:spcAft>
+              <a:defRPr sz="2900" b="1">
+                <a:solidFill>
+                  <a:srgbClr val="17324D"/>
+                </a:solidFill>
+                <a:latin typeface="Microsoft YaHei"/>
+              </a:defRPr>
+            </a:pPr>
+            <a:r>
+              <a:t>关系运行结果：功能关系附加源簇与目标簇信息</a:t>
+            </a:r>
+          </a:p>
+        </p:txBody>
+      </p:sp>
+      <p:sp>
+        <p:nvSpPr>
+          <p:cNvPr id="5" name="Rectangle 4"/>
+          <p:cNvSpPr/>
+          <p:nvPr/>
+        </p:nvSpPr>
+        <p:spPr>
+          <a:xfrm>
+            <a:off x="548640" y="6446520"/>
+            <a:ext cx="11064240" cy="10972"/>
+          </a:xfrm>
+          <a:prstGeom prst="rect">
+            <a:avLst/>
+          </a:prstGeom>
+          <a:solidFill>
+            <a:srgbClr val="DCE5ED"/>
+          </a:solidFill>
+          <a:ln>
+            <a:noFill/>
+          </a:ln>
+        </p:spPr>
+        <p:style>
+          <a:lnRef idx="1">
+            <a:schemeClr val="accent1"/>
+          </a:lnRef>
+          <a:fillRef idx="3">
+            <a:schemeClr val="accent1"/>
+          </a:fillRef>
+          <a:effectRef idx="2">
+            <a:schemeClr val="accent1"/>
+          </a:effectRef>
+          <a:fontRef idx="minor">
+            <a:schemeClr val="lt1"/>
+          </a:fontRef>
+        </p:style>
+        <p:txBody>
+          <a:bodyPr rtlCol="0" anchor="ctr"/>
+          <a:lstStyle/>
+          <a:p>
+            <a:pPr algn="ctr"/>
+          </a:p>
+        </p:txBody>
+      </p:sp>
+      <p:sp>
+        <p:nvSpPr>
+          <p:cNvPr id="6" name="TextBox 5"/>
+          <p:cNvSpPr txBox="1"/>
+          <p:nvPr/>
+        </p:nvSpPr>
+        <p:spPr>
+          <a:xfrm>
+            <a:off x="548640" y="6537960"/>
+            <a:ext cx="9144000" cy="182880"/>
+          </a:xfrm>
+          <a:prstGeom prst="rect">
+            <a:avLst/>
+          </a:prstGeom>
+          <a:noFill/>
+        </p:spPr>
+        <p:txBody>
+          <a:bodyPr wrap="square" lIns="18288" rIns="18288" tIns="0" bIns="0">
+            <a:spAutoFit/>
+          </a:bodyPr>
+          <a:lstStyle/>
+          <a:p>
+            <a:pPr>
+              <a:spcAft>
+                <a:spcPts val="800"/>
+              </a:spcAft>
+              <a:defRPr sz="900" b="0">
+                <a:solidFill>
+                  <a:srgbClr val="60758A"/>
+                </a:solidFill>
+                <a:latin typeface="Microsoft YaHei"/>
+              </a:defRPr>
+            </a:pPr>
+            <a:r>
+              <a:t>板块二  ·  功能逻辑架构生成研究汇报</a:t>
+            </a:r>
+          </a:p>
+        </p:txBody>
+      </p:sp>
+      <p:sp>
+        <p:nvSpPr>
+          <p:cNvPr id="7" name="TextBox 6"/>
+          <p:cNvSpPr txBox="1"/>
+          <p:nvPr/>
+        </p:nvSpPr>
+        <p:spPr>
+          <a:xfrm>
+            <a:off x="10972800" y="6519672"/>
+            <a:ext cx="640080" cy="228600"/>
+          </a:xfrm>
+          <a:prstGeom prst="rect">
+            <a:avLst/>
+          </a:prstGeom>
+          <a:noFill/>
+        </p:spPr>
+        <p:txBody>
+          <a:bodyPr wrap="square" lIns="18288" rIns="18288" tIns="0" bIns="0">
+            <a:spAutoFit/>
+          </a:bodyPr>
+          <a:lstStyle/>
+          <a:p>
+            <a:pPr algn="r">
+              <a:spcAft>
+                <a:spcPts val="800"/>
+              </a:spcAft>
+              <a:defRPr sz="1000" b="0">
+                <a:solidFill>
+                  <a:srgbClr val="60758A"/>
+                </a:solidFill>
+                <a:latin typeface="Microsoft YaHei"/>
+              </a:defRPr>
+            </a:pPr>
+            <a:r>
+              <a:t>09</a:t>
+            </a:r>
+          </a:p>
+        </p:txBody>
+      </p:sp>
+      <p:sp>
+        <p:nvSpPr>
+          <p:cNvPr id="8" name="Rounded Rectangle 7"/>
+          <p:cNvSpPr/>
+          <p:nvPr/>
+        </p:nvSpPr>
+        <p:spPr>
+          <a:xfrm>
+            <a:off x="594360" y="1691640"/>
+            <a:ext cx="10972800" cy="3840480"/>
+          </a:xfrm>
+          <a:prstGeom prst="roundRect">
+            <a:avLst/>
+          </a:prstGeom>
+          <a:solidFill>
+            <a:srgbClr val="FFFFFF"/>
+          </a:solidFill>
+          <a:ln>
+            <a:noFill/>
+          </a:ln>
+        </p:spPr>
+        <p:style>
+          <a:lnRef idx="1">
+            <a:schemeClr val="accent1"/>
+          </a:lnRef>
+          <a:fillRef idx="3">
+            <a:schemeClr val="accent1"/>
+          </a:fillRef>
+          <a:effectRef idx="2">
+            <a:schemeClr val="accent1"/>
+          </a:effectRef>
+          <a:fontRef idx="minor">
+            <a:schemeClr val="lt1"/>
+          </a:fontRef>
+        </p:style>
+        <p:txBody>
+          <a:bodyPr rtlCol="0" anchor="ctr"/>
+          <a:lstStyle/>
+          <a:p>
+            <a:pPr algn="ctr"/>
+          </a:p>
+        </p:txBody>
+      </p:sp>
+      <p:pic>
+        <p:nvPicPr>
+          <p:cNvPr id="9" name="Picture 8" descr="p61.png"/>
+          <p:cNvPicPr>
+            <a:picLocks noChangeAspect="1"/>
+          </p:cNvPicPr>
+          <p:nvPr/>
+        </p:nvPicPr>
+        <p:blipFill>
+          <a:blip r:embed="rId3"/>
+          <a:stretch>
+            <a:fillRect/>
+          </a:stretch>
+        </p:blipFill>
+        <p:spPr>
+          <a:xfrm>
+            <a:off x="823199" y="1828800"/>
+            <a:ext cx="10515121" cy="3474720"/>
+          </a:xfrm>
+          <a:prstGeom prst="rect">
+            <a:avLst/>
+          </a:prstGeom>
+        </p:spPr>
+      </p:pic>
+      <p:sp>
+        <p:nvSpPr>
+          <p:cNvPr id="10" name="Rounded Rectangle 9"/>
+          <p:cNvSpPr/>
+          <p:nvPr/>
+        </p:nvSpPr>
+        <p:spPr>
+          <a:xfrm>
+            <a:off x="594360" y="5806440"/>
+            <a:ext cx="10972800" cy="429768"/>
+          </a:xfrm>
+          <a:prstGeom prst="roundRect">
+            <a:avLst/>
+          </a:prstGeom>
+          <a:solidFill>
+            <a:srgbClr val="E7F3F2"/>
+          </a:solidFill>
+          <a:ln>
+            <a:noFill/>
+          </a:ln>
+        </p:spPr>
+        <p:style>
+          <a:lnRef idx="1">
+            <a:schemeClr val="accent1"/>
+          </a:lnRef>
+          <a:fillRef idx="3">
+            <a:schemeClr val="accent1"/>
+          </a:fillRef>
+          <a:effectRef idx="2">
+            <a:schemeClr val="accent1"/>
+          </a:effectRef>
+          <a:fontRef idx="minor">
+            <a:schemeClr val="lt1"/>
+          </a:fontRef>
+        </p:style>
+        <p:txBody>
+          <a:bodyPr rtlCol="0" anchor="ctr"/>
+          <a:lstStyle/>
+          <a:p>
+            <a:pPr algn="ctr"/>
+          </a:p>
+        </p:txBody>
+      </p:sp>
+      <p:sp>
+        <p:nvSpPr>
+          <p:cNvPr id="11" name="TextBox 10"/>
+          <p:cNvSpPr txBox="1"/>
+          <p:nvPr/>
+        </p:nvSpPr>
+        <p:spPr>
+          <a:xfrm>
+            <a:off x="777240" y="5888736"/>
+            <a:ext cx="10607040" cy="256032"/>
+          </a:xfrm>
+          <a:prstGeom prst="rect">
+            <a:avLst/>
+          </a:prstGeom>
+          <a:noFill/>
+        </p:spPr>
+        <p:txBody>
+          <a:bodyPr wrap="square" lIns="18288" rIns="18288" tIns="0" bIns="0">
+            <a:spAutoFit/>
+          </a:bodyPr>
+          <a:lstStyle/>
+          <a:p>
+            <a:pPr>
+              <a:spcAft>
+                <a:spcPts val="800"/>
+              </a:spcAft>
+              <a:defRPr sz="1400" b="0">
+                <a:solidFill>
+                  <a:srgbClr val="007F87"/>
+                </a:solidFill>
+                <a:latin typeface="Microsoft YaHei"/>
+              </a:defRPr>
+            </a:pPr>
+            <a:r>
+              <a:t>文档所附案例含13条关系；完整保留原截图，右缘未完整显示的字段以原JSON/Excel为准。</a:t>
+            </a:r>
+          </a:p>
+        </p:txBody>
+      </p:sp>
+    </p:spTree>
+  </p:cSld>
+  <p:clrMapOvr>
+    <a:masterClrMapping/>
+  </p:clrMapOvr>
+</p:sld>
+</file>
+
+<file path=ppt/slides/slide15.xml><?xml version="1.0" encoding="utf-8"?>
+<p:sld xmlns:a="http://schemas.openxmlformats.org/drawingml/2006/main" xmlns:p="http://schemas.openxmlformats.org/presentationml/2006/main" xmlns:r="http://schemas.openxmlformats.org/officeDocument/2006/relationships">
+  <p:cSld>
+    <p:bg>
+      <p:bgPr>
+        <a:solidFill>
+          <a:srgbClr val="F5F7FA"/>
+        </a:solidFill>
+        <a:effectLst/>
+      </p:bgPr>
+    </p:bg>
+    <p:spTree>
+      <p:nvGrpSpPr>
+        <p:cNvPr id="1" name=""/>
+        <p:cNvGrpSpPr/>
+        <p:nvPr/>
+      </p:nvGrpSpPr>
+      <p:grpSpPr/>
+      <p:sp>
+        <p:nvSpPr>
+          <p:cNvPr id="2" name="Rectangle 1"/>
+          <p:cNvSpPr/>
+          <p:nvPr/>
+        </p:nvSpPr>
+        <p:spPr>
+          <a:xfrm>
+            <a:off x="0" y="0"/>
+            <a:ext cx="12191695" cy="91440"/>
+          </a:xfrm>
+          <a:prstGeom prst="rect">
+            <a:avLst/>
+          </a:prstGeom>
+          <a:solidFill>
+            <a:srgbClr val="007F87"/>
+          </a:solidFill>
+          <a:ln>
+            <a:noFill/>
+          </a:ln>
+        </p:spPr>
+        <p:style>
+          <a:lnRef idx="1">
+            <a:schemeClr val="accent1"/>
+          </a:lnRef>
+          <a:fillRef idx="3">
+            <a:schemeClr val="accent1"/>
+          </a:fillRef>
+          <a:effectRef idx="2">
+            <a:schemeClr val="accent1"/>
+          </a:effectRef>
+          <a:fontRef idx="minor">
+            <a:schemeClr val="lt1"/>
+          </a:fontRef>
+        </p:style>
+        <p:txBody>
+          <a:bodyPr rtlCol="0" anchor="ctr"/>
+          <a:lstStyle/>
+          <a:p>
+            <a:pPr algn="ctr"/>
+          </a:p>
+        </p:txBody>
+      </p:sp>
+      <p:sp>
+        <p:nvSpPr>
+          <p:cNvPr id="3" name="TextBox 2"/>
+          <p:cNvSpPr txBox="1"/>
+          <p:nvPr/>
+        </p:nvSpPr>
+        <p:spPr>
+          <a:xfrm>
+            <a:off x="548640" y="274320"/>
+            <a:ext cx="10058400" cy="256032"/>
+          </a:xfrm>
+          <a:prstGeom prst="rect">
+            <a:avLst/>
+          </a:prstGeom>
+          <a:noFill/>
+        </p:spPr>
+        <p:txBody>
+          <a:bodyPr wrap="square" lIns="18288" rIns="18288" tIns="0" bIns="0">
+            <a:spAutoFit/>
+          </a:bodyPr>
+          <a:lstStyle/>
+          <a:p>
+            <a:pPr>
+              <a:spcAft>
+                <a:spcPts val="800"/>
+              </a:spcAft>
+              <a:defRPr sz="1100" b="1">
+                <a:solidFill>
+                  <a:srgbClr val="007F87"/>
+                </a:solidFill>
+                <a:latin typeface="Microsoft YaHei"/>
+              </a:defRPr>
+            </a:pPr>
+            <a:r>
+              <a:t>运行截图 / MBSE_app</a:t>
+            </a:r>
+          </a:p>
+        </p:txBody>
+      </p:sp>
+      <p:sp>
+        <p:nvSpPr>
+          <p:cNvPr id="4" name="TextBox 3"/>
+          <p:cNvSpPr txBox="1"/>
+          <p:nvPr/>
+        </p:nvSpPr>
+        <p:spPr>
+          <a:xfrm>
+            <a:off x="548640" y="758952"/>
+            <a:ext cx="11064240" cy="594360"/>
+          </a:xfrm>
+          <a:prstGeom prst="rect">
+            <a:avLst/>
+          </a:prstGeom>
+          <a:noFill/>
+        </p:spPr>
+        <p:txBody>
+          <a:bodyPr wrap="square" lIns="18288" rIns="18288" tIns="0" bIns="0">
+            <a:spAutoFit/>
+          </a:bodyPr>
+          <a:lstStyle/>
+          <a:p>
+            <a:pPr>
+              <a:spcAft>
+                <a:spcPts val="800"/>
+              </a:spcAft>
+              <a:defRPr sz="2900" b="1">
+                <a:solidFill>
+                  <a:srgbClr val="17324D"/>
+                </a:solidFill>
+                <a:latin typeface="Microsoft YaHei"/>
+              </a:defRPr>
+            </a:pPr>
+            <a:r>
+              <a:t>拓扑运行结果：端口、流对象与功能簇可追溯</a:t>
+            </a:r>
+          </a:p>
+        </p:txBody>
+      </p:sp>
+      <p:sp>
+        <p:nvSpPr>
+          <p:cNvPr id="5" name="Rectangle 4"/>
+          <p:cNvSpPr/>
+          <p:nvPr/>
+        </p:nvSpPr>
+        <p:spPr>
+          <a:xfrm>
+            <a:off x="548640" y="6446520"/>
+            <a:ext cx="11064240" cy="10972"/>
+          </a:xfrm>
+          <a:prstGeom prst="rect">
+            <a:avLst/>
+          </a:prstGeom>
+          <a:solidFill>
+            <a:srgbClr val="DCE5ED"/>
+          </a:solidFill>
+          <a:ln>
+            <a:noFill/>
+          </a:ln>
+        </p:spPr>
+        <p:style>
+          <a:lnRef idx="1">
+            <a:schemeClr val="accent1"/>
+          </a:lnRef>
+          <a:fillRef idx="3">
+            <a:schemeClr val="accent1"/>
+          </a:fillRef>
+          <a:effectRef idx="2">
+            <a:schemeClr val="accent1"/>
+          </a:effectRef>
+          <a:fontRef idx="minor">
+            <a:schemeClr val="lt1"/>
+          </a:fontRef>
+        </p:style>
+        <p:txBody>
+          <a:bodyPr rtlCol="0" anchor="ctr"/>
+          <a:lstStyle/>
+          <a:p>
+            <a:pPr algn="ctr"/>
+          </a:p>
+        </p:txBody>
+      </p:sp>
+      <p:sp>
+        <p:nvSpPr>
+          <p:cNvPr id="6" name="TextBox 5"/>
+          <p:cNvSpPr txBox="1"/>
+          <p:nvPr/>
+        </p:nvSpPr>
+        <p:spPr>
+          <a:xfrm>
+            <a:off x="548640" y="6537960"/>
+            <a:ext cx="9144000" cy="182880"/>
+          </a:xfrm>
+          <a:prstGeom prst="rect">
+            <a:avLst/>
+          </a:prstGeom>
+          <a:noFill/>
+        </p:spPr>
+        <p:txBody>
+          <a:bodyPr wrap="square" lIns="18288" rIns="18288" tIns="0" bIns="0">
+            <a:spAutoFit/>
+          </a:bodyPr>
+          <a:lstStyle/>
+          <a:p>
+            <a:pPr>
+              <a:spcAft>
+                <a:spcPts val="800"/>
+              </a:spcAft>
+              <a:defRPr sz="900" b="0">
+                <a:solidFill>
+                  <a:srgbClr val="60758A"/>
+                </a:solidFill>
+                <a:latin typeface="Microsoft YaHei"/>
+              </a:defRPr>
+            </a:pPr>
+            <a:r>
+              <a:t>板块二  ·  功能逻辑架构生成研究汇报</a:t>
+            </a:r>
+          </a:p>
+        </p:txBody>
+      </p:sp>
+      <p:sp>
+        <p:nvSpPr>
+          <p:cNvPr id="7" name="TextBox 6"/>
+          <p:cNvSpPr txBox="1"/>
+          <p:nvPr/>
+        </p:nvSpPr>
+        <p:spPr>
+          <a:xfrm>
+            <a:off x="10972800" y="6519672"/>
+            <a:ext cx="640080" cy="228600"/>
+          </a:xfrm>
+          <a:prstGeom prst="rect">
+            <a:avLst/>
+          </a:prstGeom>
+          <a:noFill/>
+        </p:spPr>
+        <p:txBody>
+          <a:bodyPr wrap="square" lIns="18288" rIns="18288" tIns="0" bIns="0">
+            <a:spAutoFit/>
+          </a:bodyPr>
+          <a:lstStyle/>
+          <a:p>
+            <a:pPr algn="r">
+              <a:spcAft>
+                <a:spcPts val="800"/>
+              </a:spcAft>
+              <a:defRPr sz="1000" b="0">
+                <a:solidFill>
+                  <a:srgbClr val="60758A"/>
+                </a:solidFill>
+                <a:latin typeface="Microsoft YaHei"/>
+              </a:defRPr>
+            </a:pPr>
+            <a:r>
+              <a:t>11</a:t>
+            </a:r>
+          </a:p>
+        </p:txBody>
+      </p:sp>
+      <p:sp>
+        <p:nvSpPr>
+          <p:cNvPr id="8" name="Rounded Rectangle 7"/>
+          <p:cNvSpPr/>
+          <p:nvPr/>
+        </p:nvSpPr>
+        <p:spPr>
+          <a:xfrm>
+            <a:off x="594360" y="1691640"/>
+            <a:ext cx="10972800" cy="3840480"/>
+          </a:xfrm>
+          <a:prstGeom prst="roundRect">
+            <a:avLst/>
+          </a:prstGeom>
+          <a:solidFill>
+            <a:srgbClr val="FFFFFF"/>
+          </a:solidFill>
+          <a:ln>
+            <a:noFill/>
+          </a:ln>
+        </p:spPr>
+        <p:style>
+          <a:lnRef idx="1">
+            <a:schemeClr val="accent1"/>
+          </a:lnRef>
+          <a:fillRef idx="3">
+            <a:schemeClr val="accent1"/>
+          </a:fillRef>
+          <a:effectRef idx="2">
+            <a:schemeClr val="accent1"/>
+          </a:effectRef>
+          <a:fontRef idx="minor">
+            <a:schemeClr val="lt1"/>
+          </a:fontRef>
+        </p:style>
+        <p:txBody>
+          <a:bodyPr rtlCol="0" anchor="ctr"/>
+          <a:lstStyle/>
+          <a:p>
+            <a:pPr algn="ctr"/>
+          </a:p>
+        </p:txBody>
+      </p:sp>
+      <p:pic>
+        <p:nvPicPr>
+          <p:cNvPr id="9" name="Picture 8" descr="p66.png"/>
+          <p:cNvPicPr>
+            <a:picLocks noChangeAspect="1"/>
+          </p:cNvPicPr>
+          <p:nvPr/>
+        </p:nvPicPr>
+        <p:blipFill>
+          <a:blip r:embed="rId3"/>
+          <a:stretch>
+            <a:fillRect/>
+          </a:stretch>
+        </p:blipFill>
+        <p:spPr>
+          <a:xfrm>
+            <a:off x="804162" y="1828799"/>
+            <a:ext cx="10553194" cy="3474720"/>
+          </a:xfrm>
+          <a:prstGeom prst="rect">
+            <a:avLst/>
+          </a:prstGeom>
+        </p:spPr>
+      </p:pic>
+      <p:sp>
+        <p:nvSpPr>
+          <p:cNvPr id="10" name="Rounded Rectangle 9"/>
+          <p:cNvSpPr/>
+          <p:nvPr/>
+        </p:nvSpPr>
+        <p:spPr>
+          <a:xfrm>
+            <a:off x="594360" y="5806440"/>
+            <a:ext cx="10972800" cy="429768"/>
+          </a:xfrm>
+          <a:prstGeom prst="roundRect">
+            <a:avLst/>
+          </a:prstGeom>
+          <a:solidFill>
+            <a:srgbClr val="E7F3F2"/>
+          </a:solidFill>
+          <a:ln>
+            <a:noFill/>
+          </a:ln>
+        </p:spPr>
+        <p:style>
+          <a:lnRef idx="1">
+            <a:schemeClr val="accent1"/>
+          </a:lnRef>
+          <a:fillRef idx="3">
+            <a:schemeClr val="accent1"/>
+          </a:fillRef>
+          <a:effectRef idx="2">
+            <a:schemeClr val="accent1"/>
+          </a:effectRef>
+          <a:fontRef idx="minor">
+            <a:schemeClr val="lt1"/>
+          </a:fontRef>
+        </p:style>
+        <p:txBody>
+          <a:bodyPr rtlCol="0" anchor="ctr"/>
+          <a:lstStyle/>
+          <a:p>
+            <a:pPr algn="ctr"/>
+          </a:p>
+        </p:txBody>
+      </p:sp>
+      <p:sp>
+        <p:nvSpPr>
+          <p:cNvPr id="11" name="TextBox 10"/>
+          <p:cNvSpPr txBox="1"/>
+          <p:nvPr/>
+        </p:nvSpPr>
+        <p:spPr>
+          <a:xfrm>
+            <a:off x="777240" y="5888736"/>
+            <a:ext cx="10607040" cy="256032"/>
+          </a:xfrm>
+          <a:prstGeom prst="rect">
+            <a:avLst/>
+          </a:prstGeom>
+          <a:noFill/>
+        </p:spPr>
+        <p:txBody>
+          <a:bodyPr wrap="square" lIns="18288" rIns="18288" tIns="0" bIns="0">
+            <a:spAutoFit/>
+          </a:bodyPr>
+          <a:lstStyle/>
+          <a:p>
+            <a:pPr>
+              <a:spcAft>
+                <a:spcPts val="800"/>
+              </a:spcAft>
+              <a:defRPr sz="1400" b="0">
+                <a:solidFill>
+                  <a:srgbClr val="007F87"/>
+                </a:solidFill>
+                <a:latin typeface="Microsoft YaHei"/>
+              </a:defRPr>
+            </a:pPr>
+            <a:r>
+              <a:t>对应13条连接；数据流、触发及并发/约束保持不同流对象表达。</a:t>
+            </a:r>
+          </a:p>
+        </p:txBody>
+      </p:sp>
+    </p:spTree>
+  </p:cSld>
+  <p:clrMapOvr>
+    <a:masterClrMapping/>
+  </p:clrMapOvr>
+</p:sld>
+</file>
+
+<file path=ppt/slides/slide16.xml><?xml version="1.0" encoding="utf-8"?>
+<p:sld xmlns:a="http://schemas.openxmlformats.org/drawingml/2006/main" xmlns:p="http://schemas.openxmlformats.org/presentationml/2006/main" xmlns:r="http://schemas.openxmlformats.org/officeDocument/2006/relationships">
+  <p:cSld>
+    <p:bg>
+      <p:bgPr>
+        <a:solidFill>
+          <a:srgbClr val="F5F7FA"/>
+        </a:solidFill>
+        <a:effectLst/>
+      </p:bgPr>
+    </p:bg>
+    <p:spTree>
+      <p:nvGrpSpPr>
+        <p:cNvPr id="1" name=""/>
+        <p:cNvGrpSpPr/>
+        <p:nvPr/>
+      </p:nvGrpSpPr>
+      <p:grpSpPr/>
+      <p:sp>
+        <p:nvSpPr>
+          <p:cNvPr id="2" name="Rectangle 1"/>
+          <p:cNvSpPr/>
+          <p:nvPr/>
+        </p:nvSpPr>
+        <p:spPr>
+          <a:xfrm>
+            <a:off x="0" y="0"/>
+            <a:ext cx="12191695" cy="91440"/>
+          </a:xfrm>
+          <a:prstGeom prst="rect">
+            <a:avLst/>
+          </a:prstGeom>
+          <a:solidFill>
+            <a:srgbClr val="007F87"/>
+          </a:solidFill>
+          <a:ln>
+            <a:noFill/>
+          </a:ln>
+        </p:spPr>
+        <p:style>
+          <a:lnRef idx="1">
+            <a:schemeClr val="accent1"/>
+          </a:lnRef>
+          <a:fillRef idx="3">
+            <a:schemeClr val="accent1"/>
+          </a:fillRef>
+          <a:effectRef idx="2">
+            <a:schemeClr val="accent1"/>
+          </a:effectRef>
+          <a:fontRef idx="minor">
+            <a:schemeClr val="lt1"/>
+          </a:fontRef>
+        </p:style>
+        <p:txBody>
+          <a:bodyPr rtlCol="0" anchor="ctr"/>
+          <a:lstStyle/>
+          <a:p>
+            <a:pPr algn="ctr"/>
+          </a:p>
+        </p:txBody>
+      </p:sp>
+      <p:sp>
+        <p:nvSpPr>
+          <p:cNvPr id="3" name="TextBox 2"/>
+          <p:cNvSpPr txBox="1"/>
+          <p:nvPr/>
+        </p:nvSpPr>
+        <p:spPr>
+          <a:xfrm>
+            <a:off x="548640" y="274320"/>
+            <a:ext cx="10058400" cy="256032"/>
+          </a:xfrm>
+          <a:prstGeom prst="rect">
+            <a:avLst/>
+          </a:prstGeom>
+          <a:noFill/>
+        </p:spPr>
+        <p:txBody>
+          <a:bodyPr wrap="square" lIns="18288" rIns="18288" tIns="0" bIns="0">
+            <a:spAutoFit/>
+          </a:bodyPr>
+          <a:lstStyle/>
+          <a:p>
+            <a:pPr>
+              <a:spcAft>
+                <a:spcPts val="800"/>
+              </a:spcAft>
+              <a:defRPr sz="1100" b="1">
+                <a:solidFill>
+                  <a:srgbClr val="007F87"/>
+                </a:solidFill>
+                <a:latin typeface="Microsoft YaHei"/>
+              </a:defRPr>
+            </a:pPr>
+            <a:r>
+              <a:t>核心代码 / MBSE_app</a:t>
+            </a:r>
+          </a:p>
+        </p:txBody>
+      </p:sp>
+      <p:sp>
+        <p:nvSpPr>
+          <p:cNvPr id="4" name="TextBox 3"/>
+          <p:cNvSpPr txBox="1"/>
+          <p:nvPr/>
+        </p:nvSpPr>
+        <p:spPr>
+          <a:xfrm>
+            <a:off x="548640" y="758952"/>
+            <a:ext cx="11064240" cy="594360"/>
+          </a:xfrm>
+          <a:prstGeom prst="rect">
+            <a:avLst/>
+          </a:prstGeom>
+          <a:noFill/>
+        </p:spPr>
+        <p:txBody>
+          <a:bodyPr wrap="square" lIns="18288" rIns="18288" tIns="0" bIns="0">
+            <a:spAutoFit/>
+          </a:bodyPr>
+          <a:lstStyle/>
+          <a:p>
+            <a:pPr>
+              <a:spcAft>
+                <a:spcPts val="800"/>
+              </a:spcAft>
+              <a:defRPr sz="2900" b="1">
+                <a:solidFill>
+                  <a:srgbClr val="17324D"/>
+                </a:solidFill>
+                <a:latin typeface="Microsoft YaHei"/>
+              </a:defRPr>
+            </a:pPr>
+            <a:r>
+              <a:t>Excel输出核心代码：结构化结果按Sheet保存</a:t>
+            </a:r>
+          </a:p>
+        </p:txBody>
+      </p:sp>
+      <p:sp>
+        <p:nvSpPr>
+          <p:cNvPr id="5" name="Rectangle 4"/>
+          <p:cNvSpPr/>
+          <p:nvPr/>
+        </p:nvSpPr>
+        <p:spPr>
+          <a:xfrm>
+            <a:off x="548640" y="6446520"/>
+            <a:ext cx="11064240" cy="10972"/>
+          </a:xfrm>
+          <a:prstGeom prst="rect">
+            <a:avLst/>
+          </a:prstGeom>
+          <a:solidFill>
+            <a:srgbClr val="DCE5ED"/>
+          </a:solidFill>
+          <a:ln>
+            <a:noFill/>
+          </a:ln>
+        </p:spPr>
+        <p:style>
+          <a:lnRef idx="1">
+            <a:schemeClr val="accent1"/>
+          </a:lnRef>
+          <a:fillRef idx="3">
+            <a:schemeClr val="accent1"/>
+          </a:fillRef>
+          <a:effectRef idx="2">
+            <a:schemeClr val="accent1"/>
+          </a:effectRef>
+          <a:fontRef idx="minor">
+            <a:schemeClr val="lt1"/>
+          </a:fontRef>
+        </p:style>
+        <p:txBody>
+          <a:bodyPr rtlCol="0" anchor="ctr"/>
+          <a:lstStyle/>
+          <a:p>
+            <a:pPr algn="ctr"/>
+          </a:p>
+        </p:txBody>
+      </p:sp>
+      <p:sp>
+        <p:nvSpPr>
+          <p:cNvPr id="6" name="TextBox 5"/>
+          <p:cNvSpPr txBox="1"/>
+          <p:nvPr/>
+        </p:nvSpPr>
+        <p:spPr>
+          <a:xfrm>
+            <a:off x="548640" y="6537960"/>
+            <a:ext cx="9144000" cy="182880"/>
+          </a:xfrm>
+          <a:prstGeom prst="rect">
+            <a:avLst/>
+          </a:prstGeom>
+          <a:noFill/>
+        </p:spPr>
+        <p:txBody>
+          <a:bodyPr wrap="square" lIns="18288" rIns="18288" tIns="0" bIns="0">
+            <a:spAutoFit/>
+          </a:bodyPr>
+          <a:lstStyle/>
+          <a:p>
+            <a:pPr>
+              <a:spcAft>
+                <a:spcPts val="800"/>
+              </a:spcAft>
+              <a:defRPr sz="900" b="0">
+                <a:solidFill>
+                  <a:srgbClr val="60758A"/>
+                </a:solidFill>
+                <a:latin typeface="Microsoft YaHei"/>
+              </a:defRPr>
+            </a:pPr>
+            <a:r>
+              <a:t>板块二  ·  功能逻辑架构生成研究汇报</a:t>
+            </a:r>
+          </a:p>
+        </p:txBody>
+      </p:sp>
+      <p:sp>
+        <p:nvSpPr>
+          <p:cNvPr id="7" name="TextBox 6"/>
+          <p:cNvSpPr txBox="1"/>
+          <p:nvPr/>
+        </p:nvSpPr>
+        <p:spPr>
+          <a:xfrm>
+            <a:off x="10972800" y="6519672"/>
+            <a:ext cx="640080" cy="228600"/>
+          </a:xfrm>
+          <a:prstGeom prst="rect">
+            <a:avLst/>
+          </a:prstGeom>
+          <a:noFill/>
+        </p:spPr>
+        <p:txBody>
+          <a:bodyPr wrap="square" lIns="18288" rIns="18288" tIns="0" bIns="0">
+            <a:spAutoFit/>
+          </a:bodyPr>
+          <a:lstStyle/>
+          <a:p>
+            <a:pPr algn="r">
+              <a:spcAft>
+                <a:spcPts val="800"/>
+              </a:spcAft>
+              <a:defRPr sz="1000" b="0">
+                <a:solidFill>
+                  <a:srgbClr val="60758A"/>
+                </a:solidFill>
+                <a:latin typeface="Microsoft YaHei"/>
+              </a:defRPr>
+            </a:pPr>
+            <a:r>
+              <a:t>12</a:t>
+            </a:r>
+          </a:p>
+        </p:txBody>
+      </p:sp>
+      <p:sp>
+        <p:nvSpPr>
+          <p:cNvPr id="8" name="Rounded Rectangle 7"/>
+          <p:cNvSpPr/>
+          <p:nvPr/>
+        </p:nvSpPr>
+        <p:spPr>
+          <a:xfrm>
+            <a:off x="594360" y="1691640"/>
+            <a:ext cx="10972800" cy="3886200"/>
+          </a:xfrm>
+          <a:prstGeom prst="roundRect">
+            <a:avLst/>
+          </a:prstGeom>
+          <a:solidFill>
+            <a:srgbClr val="FFFFFF"/>
+          </a:solidFill>
+          <a:ln>
+            <a:noFill/>
+          </a:ln>
+        </p:spPr>
+        <p:style>
+          <a:lnRef idx="1">
+            <a:schemeClr val="accent1"/>
+          </a:lnRef>
+          <a:fillRef idx="3">
+            <a:schemeClr val="accent1"/>
+          </a:fillRef>
+          <a:effectRef idx="2">
+            <a:schemeClr val="accent1"/>
+          </a:effectRef>
+          <a:fontRef idx="minor">
+            <a:schemeClr val="lt1"/>
+          </a:fontRef>
+        </p:style>
+        <p:txBody>
+          <a:bodyPr rtlCol="0" anchor="ctr"/>
+          <a:lstStyle/>
+          <a:p>
+            <a:pPr algn="ctr"/>
+          </a:p>
+        </p:txBody>
+      </p:sp>
+      <p:pic>
+        <p:nvPicPr>
+          <p:cNvPr id="9" name="Picture 8" descr="p68.png"/>
+          <p:cNvPicPr>
+            <a:picLocks noChangeAspect="1"/>
+          </p:cNvPicPr>
+          <p:nvPr/>
+        </p:nvPicPr>
+        <p:blipFill>
+          <a:blip r:embed="rId3"/>
+          <a:stretch>
+            <a:fillRect/>
+          </a:stretch>
+        </p:blipFill>
+        <p:spPr>
+          <a:xfrm>
+            <a:off x="1472957" y="1828800"/>
+            <a:ext cx="9215605" cy="3611880"/>
+          </a:xfrm>
+          <a:prstGeom prst="rect">
+            <a:avLst/>
+          </a:prstGeom>
+        </p:spPr>
+      </p:pic>
+      <p:sp>
+        <p:nvSpPr>
+          <p:cNvPr id="10" name="Rounded Rectangle 9"/>
+          <p:cNvSpPr/>
+          <p:nvPr/>
+        </p:nvSpPr>
+        <p:spPr>
+          <a:xfrm>
+            <a:off x="594360" y="5806440"/>
+            <a:ext cx="10972800" cy="429768"/>
+          </a:xfrm>
+          <a:prstGeom prst="roundRect">
+            <a:avLst/>
+          </a:prstGeom>
+          <a:solidFill>
+            <a:srgbClr val="E7F3F2"/>
+          </a:solidFill>
+          <a:ln>
+            <a:noFill/>
+          </a:ln>
+        </p:spPr>
+        <p:style>
+          <a:lnRef idx="1">
+            <a:schemeClr val="accent1"/>
+          </a:lnRef>
+          <a:fillRef idx="3">
+            <a:schemeClr val="accent1"/>
+          </a:fillRef>
+          <a:effectRef idx="2">
+            <a:schemeClr val="accent1"/>
+          </a:effectRef>
+          <a:fontRef idx="minor">
+            <a:schemeClr val="lt1"/>
+          </a:fontRef>
+        </p:style>
+        <p:txBody>
+          <a:bodyPr rtlCol="0" anchor="ctr"/>
+          <a:lstStyle/>
+          <a:p>
+            <a:pPr algn="ctr"/>
+          </a:p>
+        </p:txBody>
+      </p:sp>
+      <p:sp>
+        <p:nvSpPr>
+          <p:cNvPr id="11" name="TextBox 10"/>
+          <p:cNvSpPr txBox="1"/>
+          <p:nvPr/>
+        </p:nvSpPr>
+        <p:spPr>
+          <a:xfrm>
+            <a:off x="777240" y="5888736"/>
+            <a:ext cx="10607040" cy="256032"/>
+          </a:xfrm>
+          <a:prstGeom prst="rect">
+            <a:avLst/>
+          </a:prstGeom>
+          <a:noFill/>
+        </p:spPr>
+        <p:txBody>
+          <a:bodyPr wrap="square" lIns="18288" rIns="18288" tIns="0" bIns="0">
+            <a:spAutoFit/>
+          </a:bodyPr>
+          <a:lstStyle/>
+          <a:p>
+            <a:pPr>
+              <a:spcAft>
+                <a:spcPts val="800"/>
+              </a:spcAft>
+              <a:defRPr sz="1400" b="0">
+                <a:solidFill>
+                  <a:srgbClr val="007F87"/>
+                </a:solidFill>
+                <a:latin typeface="Microsoft YaHei"/>
+              </a:defRPr>
+            </a:pPr>
+            <a:r>
+              <a:t>整体成果称为功能逻辑架构数据；Sheet和文件名保留原代码命名。</a:t>
+            </a:r>
+          </a:p>
+        </p:txBody>
+      </p:sp>
+    </p:spTree>
+  </p:cSld>
+  <p:clrMapOvr>
+    <a:masterClrMapping/>
+  </p:clrMapOvr>
+</p:sld>
+</file>
+
+<file path=ppt/slides/slide17.xml><?xml version="1.0" encoding="utf-8"?>
+<p:sld xmlns:a="http://schemas.openxmlformats.org/drawingml/2006/main" xmlns:p="http://schemas.openxmlformats.org/presentationml/2006/main" xmlns:r="http://schemas.openxmlformats.org/officeDocument/2006/relationships">
+  <p:cSld>
+    <p:bg>
+      <p:bgPr>
+        <a:solidFill>
+          <a:srgbClr val="F5F7FA"/>
+        </a:solidFill>
+        <a:effectLst/>
+      </p:bgPr>
+    </p:bg>
+    <p:spTree>
+      <p:nvGrpSpPr>
+        <p:cNvPr id="1" name=""/>
+        <p:cNvGrpSpPr/>
+        <p:nvPr/>
+      </p:nvGrpSpPr>
+      <p:grpSpPr/>
+      <p:sp>
+        <p:nvSpPr>
+          <p:cNvPr id="2" name="Rectangle 1"/>
+          <p:cNvSpPr/>
+          <p:nvPr/>
+        </p:nvSpPr>
+        <p:spPr>
+          <a:xfrm>
+            <a:off x="0" y="0"/>
+            <a:ext cx="12191695" cy="91440"/>
+          </a:xfrm>
+          <a:prstGeom prst="rect">
+            <a:avLst/>
+          </a:prstGeom>
+          <a:solidFill>
+            <a:srgbClr val="007F87"/>
+          </a:solidFill>
+          <a:ln>
+            <a:noFill/>
+          </a:ln>
+        </p:spPr>
+        <p:style>
+          <a:lnRef idx="1">
+            <a:schemeClr val="accent1"/>
+          </a:lnRef>
+          <a:fillRef idx="3">
+            <a:schemeClr val="accent1"/>
+          </a:fillRef>
+          <a:effectRef idx="2">
+            <a:schemeClr val="accent1"/>
+          </a:effectRef>
+          <a:fontRef idx="minor">
+            <a:schemeClr val="lt1"/>
+          </a:fontRef>
+        </p:style>
+        <p:txBody>
+          <a:bodyPr rtlCol="0" anchor="ctr"/>
+          <a:lstStyle/>
+          <a:p>
+            <a:pPr algn="ctr"/>
+          </a:p>
+        </p:txBody>
+      </p:sp>
+      <p:sp>
+        <p:nvSpPr>
+          <p:cNvPr id="3" name="TextBox 2"/>
+          <p:cNvSpPr txBox="1"/>
+          <p:nvPr/>
+        </p:nvSpPr>
+        <p:spPr>
+          <a:xfrm>
+            <a:off x="548640" y="274320"/>
+            <a:ext cx="10058400" cy="256032"/>
+          </a:xfrm>
+          <a:prstGeom prst="rect">
+            <a:avLst/>
+          </a:prstGeom>
+          <a:noFill/>
+        </p:spPr>
+        <p:txBody>
+          <a:bodyPr wrap="square" lIns="18288" rIns="18288" tIns="0" bIns="0">
+            <a:spAutoFit/>
+          </a:bodyPr>
+          <a:lstStyle/>
+          <a:p>
+            <a:pPr>
+              <a:spcAft>
+                <a:spcPts val="800"/>
+              </a:spcAft>
+              <a:defRPr sz="1100" b="1">
+                <a:solidFill>
+                  <a:srgbClr val="007F87"/>
+                </a:solidFill>
+                <a:latin typeface="Microsoft YaHei"/>
+              </a:defRPr>
+            </a:pPr>
+            <a:r>
+              <a:t>核心代码 / MBSE_app</a:t>
+            </a:r>
+          </a:p>
+        </p:txBody>
+      </p:sp>
+      <p:sp>
+        <p:nvSpPr>
+          <p:cNvPr id="4" name="TextBox 3"/>
+          <p:cNvSpPr txBox="1"/>
+          <p:nvPr/>
+        </p:nvSpPr>
+        <p:spPr>
+          <a:xfrm>
+            <a:off x="548640" y="758952"/>
+            <a:ext cx="11064240" cy="594360"/>
+          </a:xfrm>
+          <a:prstGeom prst="rect">
+            <a:avLst/>
+          </a:prstGeom>
+          <a:noFill/>
+        </p:spPr>
+        <p:txBody>
+          <a:bodyPr wrap="square" lIns="18288" rIns="18288" tIns="0" bIns="0">
+            <a:spAutoFit/>
+          </a:bodyPr>
+          <a:lstStyle/>
+          <a:p>
+            <a:pPr>
+              <a:spcAft>
+                <a:spcPts val="800"/>
+              </a:spcAft>
+              <a:defRPr sz="2900" b="1">
+                <a:solidFill>
+                  <a:srgbClr val="17324D"/>
+                </a:solidFill>
+                <a:latin typeface="Microsoft YaHei"/>
+              </a:defRPr>
+            </a:pPr>
+            <a:r>
+              <a:t>JSON输出核心代码：组织架构数据及评价指标</a:t>
+            </a:r>
+          </a:p>
+        </p:txBody>
+      </p:sp>
+      <p:sp>
+        <p:nvSpPr>
+          <p:cNvPr id="5" name="Rectangle 4"/>
+          <p:cNvSpPr/>
+          <p:nvPr/>
+        </p:nvSpPr>
+        <p:spPr>
+          <a:xfrm>
+            <a:off x="548640" y="6446520"/>
+            <a:ext cx="11064240" cy="10972"/>
+          </a:xfrm>
+          <a:prstGeom prst="rect">
+            <a:avLst/>
+          </a:prstGeom>
+          <a:solidFill>
+            <a:srgbClr val="DCE5ED"/>
+          </a:solidFill>
+          <a:ln>
+            <a:noFill/>
+          </a:ln>
+        </p:spPr>
+        <p:style>
+          <a:lnRef idx="1">
+            <a:schemeClr val="accent1"/>
+          </a:lnRef>
+          <a:fillRef idx="3">
+            <a:schemeClr val="accent1"/>
+          </a:fillRef>
+          <a:effectRef idx="2">
+            <a:schemeClr val="accent1"/>
+          </a:effectRef>
+          <a:fontRef idx="minor">
+            <a:schemeClr val="lt1"/>
+          </a:fontRef>
+        </p:style>
+        <p:txBody>
+          <a:bodyPr rtlCol="0" anchor="ctr"/>
+          <a:lstStyle/>
+          <a:p>
+            <a:pPr algn="ctr"/>
+          </a:p>
+        </p:txBody>
+      </p:sp>
+      <p:sp>
+        <p:nvSpPr>
+          <p:cNvPr id="6" name="TextBox 5"/>
+          <p:cNvSpPr txBox="1"/>
+          <p:nvPr/>
+        </p:nvSpPr>
+        <p:spPr>
+          <a:xfrm>
+            <a:off x="548640" y="6537960"/>
+            <a:ext cx="9144000" cy="182880"/>
+          </a:xfrm>
+          <a:prstGeom prst="rect">
+            <a:avLst/>
+          </a:prstGeom>
+          <a:noFill/>
+        </p:spPr>
+        <p:txBody>
+          <a:bodyPr wrap="square" lIns="18288" rIns="18288" tIns="0" bIns="0">
+            <a:spAutoFit/>
+          </a:bodyPr>
+          <a:lstStyle/>
+          <a:p>
+            <a:pPr>
+              <a:spcAft>
+                <a:spcPts val="800"/>
+              </a:spcAft>
+              <a:defRPr sz="900" b="0">
+                <a:solidFill>
+                  <a:srgbClr val="60758A"/>
+                </a:solidFill>
+                <a:latin typeface="Microsoft YaHei"/>
+              </a:defRPr>
+            </a:pPr>
+            <a:r>
+              <a:t>板块二  ·  功能逻辑架构生成研究汇报</a:t>
+            </a:r>
+          </a:p>
+        </p:txBody>
+      </p:sp>
+      <p:sp>
+        <p:nvSpPr>
+          <p:cNvPr id="7" name="TextBox 6"/>
+          <p:cNvSpPr txBox="1"/>
+          <p:nvPr/>
+        </p:nvSpPr>
+        <p:spPr>
+          <a:xfrm>
+            <a:off x="10972800" y="6519672"/>
+            <a:ext cx="640080" cy="228600"/>
+          </a:xfrm>
+          <a:prstGeom prst="rect">
+            <a:avLst/>
+          </a:prstGeom>
+          <a:noFill/>
+        </p:spPr>
+        <p:txBody>
+          <a:bodyPr wrap="square" lIns="18288" rIns="18288" tIns="0" bIns="0">
+            <a:spAutoFit/>
+          </a:bodyPr>
+          <a:lstStyle/>
+          <a:p>
+            <a:pPr algn="r">
+              <a:spcAft>
+                <a:spcPts val="800"/>
+              </a:spcAft>
+              <a:defRPr sz="1000" b="0">
+                <a:solidFill>
+                  <a:srgbClr val="60758A"/>
+                </a:solidFill>
+                <a:latin typeface="Microsoft YaHei"/>
+              </a:defRPr>
+            </a:pPr>
+            <a:r>
+              <a:t>13</a:t>
+            </a:r>
+          </a:p>
+        </p:txBody>
+      </p:sp>
+      <p:sp>
+        <p:nvSpPr>
+          <p:cNvPr id="8" name="Rounded Rectangle 7"/>
+          <p:cNvSpPr/>
+          <p:nvPr/>
+        </p:nvSpPr>
+        <p:spPr>
+          <a:xfrm>
+            <a:off x="594360" y="1691640"/>
+            <a:ext cx="10972800" cy="3886200"/>
+          </a:xfrm>
+          <a:prstGeom prst="roundRect">
+            <a:avLst/>
+          </a:prstGeom>
+          <a:solidFill>
+            <a:srgbClr val="FFFFFF"/>
+          </a:solidFill>
+          <a:ln>
+            <a:noFill/>
+          </a:ln>
+        </p:spPr>
+        <p:style>
+          <a:lnRef idx="1">
+            <a:schemeClr val="accent1"/>
+          </a:lnRef>
+          <a:fillRef idx="3">
+            <a:schemeClr val="accent1"/>
+          </a:fillRef>
+          <a:effectRef idx="2">
+            <a:schemeClr val="accent1"/>
+          </a:effectRef>
+          <a:fontRef idx="minor">
+            <a:schemeClr val="lt1"/>
+          </a:fontRef>
+        </p:style>
+        <p:txBody>
+          <a:bodyPr rtlCol="0" anchor="ctr"/>
+          <a:lstStyle/>
+          <a:p>
+            <a:pPr algn="ctr"/>
+          </a:p>
+        </p:txBody>
+      </p:sp>
+      <p:pic>
+        <p:nvPicPr>
+          <p:cNvPr id="9" name="Picture 8" descr="p69.png"/>
+          <p:cNvPicPr>
+            <a:picLocks noChangeAspect="1"/>
+          </p:cNvPicPr>
+          <p:nvPr/>
+        </p:nvPicPr>
+        <p:blipFill>
+          <a:blip r:embed="rId3"/>
+          <a:stretch>
+            <a:fillRect/>
+          </a:stretch>
+        </p:blipFill>
+        <p:spPr>
+          <a:xfrm>
+            <a:off x="1595897" y="1828800"/>
+            <a:ext cx="8969724" cy="3611880"/>
+          </a:xfrm>
+          <a:prstGeom prst="rect">
+            <a:avLst/>
+          </a:prstGeom>
+        </p:spPr>
+      </p:pic>
+      <p:sp>
+        <p:nvSpPr>
+          <p:cNvPr id="10" name="Rounded Rectangle 9"/>
+          <p:cNvSpPr/>
+          <p:nvPr/>
+        </p:nvSpPr>
+        <p:spPr>
+          <a:xfrm>
+            <a:off x="594360" y="5806440"/>
+            <a:ext cx="10972800" cy="429768"/>
+          </a:xfrm>
+          <a:prstGeom prst="roundRect">
+            <a:avLst/>
+          </a:prstGeom>
+          <a:solidFill>
+            <a:srgbClr val="E7F3F2"/>
+          </a:solidFill>
+          <a:ln>
+            <a:noFill/>
+          </a:ln>
+        </p:spPr>
+        <p:style>
+          <a:lnRef idx="1">
+            <a:schemeClr val="accent1"/>
+          </a:lnRef>
+          <a:fillRef idx="3">
+            <a:schemeClr val="accent1"/>
+          </a:fillRef>
+          <a:effectRef idx="2">
+            <a:schemeClr val="accent1"/>
+          </a:effectRef>
+          <a:fontRef idx="minor">
+            <a:schemeClr val="lt1"/>
+          </a:fontRef>
+        </p:style>
+        <p:txBody>
+          <a:bodyPr rtlCol="0" anchor="ctr"/>
+          <a:lstStyle/>
+          <a:p>
+            <a:pPr algn="ctr"/>
+          </a:p>
+        </p:txBody>
+      </p:sp>
+      <p:sp>
+        <p:nvSpPr>
+          <p:cNvPr id="11" name="TextBox 10"/>
+          <p:cNvSpPr txBox="1"/>
+          <p:nvPr/>
+        </p:nvSpPr>
+        <p:spPr>
+          <a:xfrm>
+            <a:off x="777240" y="5888736"/>
+            <a:ext cx="10607040" cy="256032"/>
+          </a:xfrm>
+          <a:prstGeom prst="rect">
+            <a:avLst/>
+          </a:prstGeom>
+          <a:noFill/>
+        </p:spPr>
+        <p:txBody>
+          <a:bodyPr wrap="square" lIns="18288" rIns="18288" tIns="0" bIns="0">
+            <a:spAutoFit/>
+          </a:bodyPr>
+          <a:lstStyle/>
+          <a:p>
+            <a:pPr>
+              <a:spcAft>
+                <a:spcPts val="800"/>
+              </a:spcAft>
+              <a:defRPr sz="1400" b="0">
+                <a:solidFill>
+                  <a:srgbClr val="007F87"/>
+                </a:solidFill>
+                <a:latin typeface="Microsoft YaHei"/>
+              </a:defRPr>
+            </a:pPr>
+            <a:r>
+              <a:t>JSON使用UTF-8编码；allow_nan=False，避免导出非标准NaN/Infinity。</a:t>
+            </a:r>
+          </a:p>
+        </p:txBody>
+      </p:sp>
+    </p:spTree>
+  </p:cSld>
+  <p:clrMapOvr>
+    <a:masterClrMapping/>
+  </p:clrMapOvr>
+</p:sld>
+</file>
+
+<file path=ppt/slides/slide18.xml><?xml version="1.0" encoding="utf-8"?>
+<p:sld xmlns:a="http://schemas.openxmlformats.org/drawingml/2006/main" xmlns:p="http://schemas.openxmlformats.org/presentationml/2006/main" xmlns:r="http://schemas.openxmlformats.org/officeDocument/2006/relationships">
+  <p:cSld>
+    <p:bg>
+      <p:bgPr>
+        <a:solidFill>
+          <a:srgbClr val="F5F7FA"/>
+        </a:solidFill>
+        <a:effectLst/>
+      </p:bgPr>
+    </p:bg>
+    <p:spTree>
+      <p:nvGrpSpPr>
+        <p:cNvPr id="1" name=""/>
+        <p:cNvGrpSpPr/>
+        <p:nvPr/>
+      </p:nvGrpSpPr>
+      <p:grpSpPr/>
+      <p:sp>
+        <p:nvSpPr>
+          <p:cNvPr id="2" name="Rectangle 1"/>
+          <p:cNvSpPr/>
+          <p:nvPr/>
+        </p:nvSpPr>
+        <p:spPr>
+          <a:xfrm>
+            <a:off x="0" y="0"/>
+            <a:ext cx="12191695" cy="91440"/>
+          </a:xfrm>
+          <a:prstGeom prst="rect">
+            <a:avLst/>
+          </a:prstGeom>
+          <a:solidFill>
+            <a:srgbClr val="007F87"/>
+          </a:solidFill>
+          <a:ln>
+            <a:noFill/>
+          </a:ln>
+        </p:spPr>
+        <p:style>
+          <a:lnRef idx="1">
+            <a:schemeClr val="accent1"/>
+          </a:lnRef>
+          <a:fillRef idx="3">
+            <a:schemeClr val="accent1"/>
+          </a:fillRef>
+          <a:effectRef idx="2">
+            <a:schemeClr val="accent1"/>
+          </a:effectRef>
+          <a:fontRef idx="minor">
+            <a:schemeClr val="lt1"/>
+          </a:fontRef>
+        </p:style>
+        <p:txBody>
+          <a:bodyPr rtlCol="0" anchor="ctr"/>
+          <a:lstStyle/>
+          <a:p>
+            <a:pPr algn="ctr"/>
+          </a:p>
+        </p:txBody>
+      </p:sp>
+      <p:sp>
+        <p:nvSpPr>
+          <p:cNvPr id="3" name="TextBox 2"/>
+          <p:cNvSpPr txBox="1"/>
+          <p:nvPr/>
+        </p:nvSpPr>
+        <p:spPr>
+          <a:xfrm>
+            <a:off x="548640" y="274320"/>
+            <a:ext cx="10058400" cy="256032"/>
+          </a:xfrm>
+          <a:prstGeom prst="rect">
+            <a:avLst/>
+          </a:prstGeom>
+          <a:noFill/>
+        </p:spPr>
+        <p:txBody>
+          <a:bodyPr wrap="square" lIns="18288" rIns="18288" tIns="0" bIns="0">
+            <a:spAutoFit/>
+          </a:bodyPr>
+          <a:lstStyle/>
+          <a:p>
+            <a:pPr>
+              <a:spcAft>
+                <a:spcPts val="800"/>
+              </a:spcAft>
+              <a:defRPr sz="1100" b="1">
+                <a:solidFill>
+                  <a:srgbClr val="007F87"/>
+                </a:solidFill>
+                <a:latin typeface="Microsoft YaHei"/>
+              </a:defRPr>
+            </a:pPr>
+            <a:r>
+              <a:t>运行截图 / MBSE_app</a:t>
+            </a:r>
+          </a:p>
+        </p:txBody>
+      </p:sp>
+      <p:sp>
+        <p:nvSpPr>
+          <p:cNvPr id="4" name="TextBox 3"/>
+          <p:cNvSpPr txBox="1"/>
+          <p:nvPr/>
+        </p:nvSpPr>
+        <p:spPr>
+          <a:xfrm>
+            <a:off x="548640" y="758952"/>
+            <a:ext cx="11064240" cy="594360"/>
+          </a:xfrm>
+          <a:prstGeom prst="rect">
+            <a:avLst/>
+          </a:prstGeom>
+          <a:noFill/>
+        </p:spPr>
+        <p:txBody>
+          <a:bodyPr wrap="square" lIns="18288" rIns="18288" tIns="0" bIns="0">
+            <a:spAutoFit/>
+          </a:bodyPr>
+          <a:lstStyle/>
+          <a:p>
+            <a:pPr>
+              <a:spcAft>
+                <a:spcPts val="800"/>
+              </a:spcAft>
+              <a:defRPr sz="2900" b="1">
+                <a:solidFill>
+                  <a:srgbClr val="17324D"/>
+                </a:solidFill>
+                <a:latin typeface="Microsoft YaHei"/>
+              </a:defRPr>
+            </a:pPr>
+            <a:r>
+              <a:t>输出运行截图：架构结果与前置校验报告已形成</a:t>
+            </a:r>
+          </a:p>
+        </p:txBody>
+      </p:sp>
+      <p:sp>
+        <p:nvSpPr>
+          <p:cNvPr id="5" name="Rectangle 4"/>
+          <p:cNvSpPr/>
+          <p:nvPr/>
+        </p:nvSpPr>
+        <p:spPr>
+          <a:xfrm>
+            <a:off x="548640" y="6446520"/>
+            <a:ext cx="11064240" cy="10972"/>
+          </a:xfrm>
+          <a:prstGeom prst="rect">
+            <a:avLst/>
+          </a:prstGeom>
+          <a:solidFill>
+            <a:srgbClr val="DCE5ED"/>
+          </a:solidFill>
+          <a:ln>
+            <a:noFill/>
+          </a:ln>
+        </p:spPr>
+        <p:style>
+          <a:lnRef idx="1">
+            <a:schemeClr val="accent1"/>
+          </a:lnRef>
+          <a:fillRef idx="3">
+            <a:schemeClr val="accent1"/>
+          </a:fillRef>
+          <a:effectRef idx="2">
+            <a:schemeClr val="accent1"/>
+          </a:effectRef>
+          <a:fontRef idx="minor">
+            <a:schemeClr val="lt1"/>
+          </a:fontRef>
+        </p:style>
+        <p:txBody>
+          <a:bodyPr rtlCol="0" anchor="ctr"/>
+          <a:lstStyle/>
+          <a:p>
+            <a:pPr algn="ctr"/>
+          </a:p>
+        </p:txBody>
+      </p:sp>
+      <p:sp>
+        <p:nvSpPr>
+          <p:cNvPr id="6" name="TextBox 5"/>
+          <p:cNvSpPr txBox="1"/>
+          <p:nvPr/>
+        </p:nvSpPr>
+        <p:spPr>
+          <a:xfrm>
+            <a:off x="548640" y="6537960"/>
+            <a:ext cx="9144000" cy="182880"/>
+          </a:xfrm>
+          <a:prstGeom prst="rect">
+            <a:avLst/>
+          </a:prstGeom>
+          <a:noFill/>
+        </p:spPr>
+        <p:txBody>
+          <a:bodyPr wrap="square" lIns="18288" rIns="18288" tIns="0" bIns="0">
+            <a:spAutoFit/>
+          </a:bodyPr>
+          <a:lstStyle/>
+          <a:p>
+            <a:pPr>
+              <a:spcAft>
+                <a:spcPts val="800"/>
+              </a:spcAft>
+              <a:defRPr sz="900" b="0">
+                <a:solidFill>
+                  <a:srgbClr val="60758A"/>
+                </a:solidFill>
+                <a:latin typeface="Microsoft YaHei"/>
+              </a:defRPr>
+            </a:pPr>
+            <a:r>
+              <a:t>板块二  ·  功能逻辑架构生成研究汇报</a:t>
+            </a:r>
+          </a:p>
+        </p:txBody>
+      </p:sp>
+      <p:sp>
+        <p:nvSpPr>
+          <p:cNvPr id="7" name="TextBox 6"/>
+          <p:cNvSpPr txBox="1"/>
+          <p:nvPr/>
+        </p:nvSpPr>
+        <p:spPr>
+          <a:xfrm>
+            <a:off x="10972800" y="6519672"/>
+            <a:ext cx="640080" cy="228600"/>
+          </a:xfrm>
+          <a:prstGeom prst="rect">
+            <a:avLst/>
+          </a:prstGeom>
+          <a:noFill/>
+        </p:spPr>
+        <p:txBody>
+          <a:bodyPr wrap="square" lIns="18288" rIns="18288" tIns="0" bIns="0">
+            <a:spAutoFit/>
+          </a:bodyPr>
+          <a:lstStyle/>
+          <a:p>
+            <a:pPr algn="r">
+              <a:spcAft>
+                <a:spcPts val="800"/>
+              </a:spcAft>
+              <a:defRPr sz="1000" b="0">
+                <a:solidFill>
+                  <a:srgbClr val="60758A"/>
+                </a:solidFill>
+                <a:latin typeface="Microsoft YaHei"/>
+              </a:defRPr>
+            </a:pPr>
+            <a:r>
+              <a:t>14</a:t>
+            </a:r>
+          </a:p>
+        </p:txBody>
+      </p:sp>
+      <p:sp>
+        <p:nvSpPr>
+          <p:cNvPr id="8" name="Rounded Rectangle 7"/>
+          <p:cNvSpPr/>
+          <p:nvPr/>
+        </p:nvSpPr>
+        <p:spPr>
+          <a:xfrm>
+            <a:off x="594360" y="1828800"/>
+            <a:ext cx="10972800" cy="2743200"/>
+          </a:xfrm>
+          <a:prstGeom prst="roundRect">
+            <a:avLst/>
+          </a:prstGeom>
+          <a:solidFill>
+            <a:srgbClr val="FFFFFF"/>
+          </a:solidFill>
+          <a:ln>
+            <a:noFill/>
+          </a:ln>
+        </p:spPr>
+        <p:style>
+          <a:lnRef idx="1">
+            <a:schemeClr val="accent1"/>
+          </a:lnRef>
+          <a:fillRef idx="3">
+            <a:schemeClr val="accent1"/>
+          </a:fillRef>
+          <a:effectRef idx="2">
+            <a:schemeClr val="accent1"/>
+          </a:effectRef>
+          <a:fontRef idx="minor">
+            <a:schemeClr val="lt1"/>
+          </a:fontRef>
+        </p:style>
+        <p:txBody>
+          <a:bodyPr rtlCol="0" anchor="ctr"/>
+          <a:lstStyle/>
+          <a:p>
+            <a:pPr algn="ctr"/>
+          </a:p>
+        </p:txBody>
+      </p:sp>
+      <p:pic>
+        <p:nvPicPr>
+          <p:cNvPr id="9" name="Picture 8" descr="p71.png"/>
+          <p:cNvPicPr>
+            <a:picLocks noChangeAspect="1"/>
+          </p:cNvPicPr>
+          <p:nvPr/>
+        </p:nvPicPr>
+        <p:blipFill>
+          <a:blip r:embed="rId3"/>
+          <a:stretch>
+            <a:fillRect/>
+          </a:stretch>
+        </p:blipFill>
+        <p:spPr>
+          <a:xfrm>
+            <a:off x="844235" y="2103120"/>
+            <a:ext cx="10473048" cy="2194560"/>
+          </a:xfrm>
+          <a:prstGeom prst="rect">
+            <a:avLst/>
+          </a:prstGeom>
+        </p:spPr>
+      </p:pic>
+      <p:sp>
+        <p:nvSpPr>
+          <p:cNvPr id="10" name="TextBox 9"/>
+          <p:cNvSpPr txBox="1"/>
+          <p:nvPr/>
+        </p:nvSpPr>
+        <p:spPr>
+          <a:xfrm>
+            <a:off x="777240" y="4892040"/>
+            <a:ext cx="10607040" cy="594360"/>
+          </a:xfrm>
+          <a:prstGeom prst="rect">
+            <a:avLst/>
+          </a:prstGeom>
+          <a:noFill/>
+        </p:spPr>
+        <p:txBody>
+          <a:bodyPr wrap="square" lIns="18288" rIns="18288" tIns="0" bIns="0">
+            <a:spAutoFit/>
+          </a:bodyPr>
+          <a:lstStyle/>
+          <a:p>
+            <a:pPr>
+              <a:spcAft>
+                <a:spcPts val="800"/>
+              </a:spcAft>
+              <a:defRPr sz="2000" b="0">
+                <a:solidFill>
+                  <a:srgbClr val="007F87"/>
+                </a:solidFill>
+                <a:latin typeface="Microsoft YaHei"/>
+              </a:defRPr>
+            </a:pPr>
+            <a:r>
+              <a:t>整体交付名称：功能逻辑架构数据</a:t>
+            </a:r>
+          </a:p>
+          <a:p>
+            <a:pPr>
+              <a:spcAft>
+                <a:spcPts val="800"/>
+              </a:spcAft>
+              <a:defRPr sz="2000" b="0">
+                <a:solidFill>
+                  <a:srgbClr val="007F87"/>
+                </a:solidFill>
+                <a:latin typeface="Microsoft YaHei"/>
+              </a:defRPr>
+            </a:pPr>
+            <a:r>
+              <a:t>原型文件名保留原代码命名，后续按对接字段形成交换格式。</a:t>
+            </a:r>
+          </a:p>
+        </p:txBody>
+      </p:sp>
+      <p:sp>
+        <p:nvSpPr>
+          <p:cNvPr id="11" name="Rounded Rectangle 10"/>
+          <p:cNvSpPr/>
+          <p:nvPr/>
+        </p:nvSpPr>
+        <p:spPr>
+          <a:xfrm>
+            <a:off x="594360" y="5806440"/>
+            <a:ext cx="10972800" cy="429768"/>
+          </a:xfrm>
+          <a:prstGeom prst="roundRect">
+            <a:avLst/>
+          </a:prstGeom>
+          <a:solidFill>
+            <a:srgbClr val="E7F3F2"/>
+          </a:solidFill>
+          <a:ln>
+            <a:noFill/>
+          </a:ln>
+        </p:spPr>
+        <p:style>
+          <a:lnRef idx="1">
+            <a:schemeClr val="accent1"/>
+          </a:lnRef>
+          <a:fillRef idx="3">
+            <a:schemeClr val="accent1"/>
+          </a:fillRef>
+          <a:effectRef idx="2">
+            <a:schemeClr val="accent1"/>
+          </a:effectRef>
+          <a:fontRef idx="minor">
+            <a:schemeClr val="lt1"/>
+          </a:fontRef>
+        </p:style>
+        <p:txBody>
+          <a:bodyPr rtlCol="0" anchor="ctr"/>
+          <a:lstStyle/>
+          <a:p>
+            <a:pPr algn="ctr"/>
+          </a:p>
+        </p:txBody>
+      </p:sp>
+      <p:sp>
+        <p:nvSpPr>
+          <p:cNvPr id="12" name="TextBox 11"/>
+          <p:cNvSpPr txBox="1"/>
+          <p:nvPr/>
+        </p:nvSpPr>
+        <p:spPr>
+          <a:xfrm>
+            <a:off x="777240" y="5888736"/>
+            <a:ext cx="10607040" cy="256032"/>
+          </a:xfrm>
+          <a:prstGeom prst="rect">
+            <a:avLst/>
+          </a:prstGeom>
+          <a:noFill/>
+        </p:spPr>
+        <p:txBody>
+          <a:bodyPr wrap="square" lIns="18288" rIns="18288" tIns="0" bIns="0">
+            <a:spAutoFit/>
+          </a:bodyPr>
+          <a:lstStyle/>
+          <a:p>
+            <a:pPr>
+              <a:spcAft>
+                <a:spcPts val="800"/>
+              </a:spcAft>
+              <a:defRPr sz="1400" b="0">
+                <a:solidFill>
+                  <a:srgbClr val="007F87"/>
+                </a:solidFill>
+                <a:latin typeface="Microsoft YaHei"/>
+              </a:defRPr>
+            </a:pPr>
+            <a:r>
+              <a:t>主线处理证据来自MBSE_app；两个对外接口的设计与联调另在接口章节说明。</a:t>
+            </a:r>
+          </a:p>
+        </p:txBody>
+      </p:sp>
+    </p:spTree>
+  </p:cSld>
+  <p:clrMapOvr>
+    <a:masterClrMapping/>
+  </p:clrMapOvr>
+</p:sld>
+</file>
+
+<file path=ppt/slides/slide19.xml><?xml version="1.0" encoding="utf-8"?>
+<p:sld xmlns:a="http://schemas.openxmlformats.org/drawingml/2006/main" xmlns:p="http://schemas.openxmlformats.org/presentationml/2006/main" xmlns:r="http://schemas.openxmlformats.org/officeDocument/2006/relationships">
+  <p:cSld>
+    <p:bg>
+      <p:bgPr>
+        <a:solidFill>
+          <a:srgbClr val="F5F7FA"/>
+        </a:solidFill>
+        <a:effectLst/>
+      </p:bgPr>
+    </p:bg>
+    <p:spTree>
+      <p:nvGrpSpPr>
+        <p:cNvPr id="1" name=""/>
+        <p:cNvGrpSpPr/>
+        <p:nvPr/>
+      </p:nvGrpSpPr>
+      <p:grpSpPr/>
+      <p:sp>
+        <p:nvSpPr>
+          <p:cNvPr id="2" name="Rectangle 1"/>
+          <p:cNvSpPr/>
+          <p:nvPr/>
+        </p:nvSpPr>
+        <p:spPr>
+          <a:xfrm>
+            <a:off x="0" y="0"/>
+            <a:ext cx="12191695" cy="91440"/>
+          </a:xfrm>
+          <a:prstGeom prst="rect">
+            <a:avLst/>
+          </a:prstGeom>
+          <a:solidFill>
+            <a:srgbClr val="007F87"/>
+          </a:solidFill>
+          <a:ln>
+            <a:noFill/>
+          </a:ln>
+        </p:spPr>
+        <p:style>
+          <a:lnRef idx="1">
+            <a:schemeClr val="accent1"/>
+          </a:lnRef>
+          <a:fillRef idx="3">
+            <a:schemeClr val="accent1"/>
+          </a:fillRef>
+          <a:effectRef idx="2">
+            <a:schemeClr val="accent1"/>
+          </a:effectRef>
+          <a:fontRef idx="minor">
+            <a:schemeClr val="lt1"/>
+          </a:fontRef>
+        </p:style>
+        <p:txBody>
+          <a:bodyPr rtlCol="0" anchor="ctr"/>
+          <a:lstStyle/>
+          <a:p>
+            <a:pPr algn="ctr"/>
+          </a:p>
+        </p:txBody>
+      </p:sp>
+      <p:sp>
+        <p:nvSpPr>
+          <p:cNvPr id="3" name="TextBox 2"/>
+          <p:cNvSpPr txBox="1"/>
+          <p:nvPr/>
+        </p:nvSpPr>
+        <p:spPr>
+          <a:xfrm>
+            <a:off x="548640" y="274320"/>
+            <a:ext cx="10058400" cy="256032"/>
+          </a:xfrm>
+          <a:prstGeom prst="rect">
+            <a:avLst/>
+          </a:prstGeom>
+          <a:noFill/>
+        </p:spPr>
+        <p:txBody>
+          <a:bodyPr wrap="square" lIns="18288" rIns="18288" tIns="0" bIns="0">
+            <a:spAutoFit/>
+          </a:bodyPr>
+          <a:lstStyle/>
+          <a:p>
+            <a:pPr>
+              <a:spcAft>
+                <a:spcPts val="800"/>
+              </a:spcAft>
+              <a:defRPr sz="1100" b="1">
+                <a:solidFill>
+                  <a:srgbClr val="007F87"/>
+                </a:solidFill>
+                <a:latin typeface="Microsoft YaHei"/>
+              </a:defRPr>
+            </a:pPr>
+            <a:r>
+              <a:t>接口设计 / 服务器版本</a:t>
+            </a:r>
+          </a:p>
+        </p:txBody>
+      </p:sp>
+      <p:sp>
+        <p:nvSpPr>
+          <p:cNvPr id="4" name="TextBox 3"/>
+          <p:cNvSpPr txBox="1"/>
+          <p:nvPr/>
+        </p:nvSpPr>
+        <p:spPr>
+          <a:xfrm>
+            <a:off x="548640" y="758952"/>
+            <a:ext cx="11064240" cy="594360"/>
+          </a:xfrm>
+          <a:prstGeom prst="rect">
+            <a:avLst/>
+          </a:prstGeom>
+          <a:noFill/>
+        </p:spPr>
+        <p:txBody>
+          <a:bodyPr wrap="square" lIns="18288" rIns="18288" tIns="0" bIns="0">
+            <a:spAutoFit/>
+          </a:bodyPr>
+          <a:lstStyle/>
+          <a:p>
+            <a:pPr>
+              <a:spcAft>
+                <a:spcPts val="800"/>
+              </a:spcAft>
+              <a:defRPr sz="2900" b="1">
+                <a:solidFill>
+                  <a:srgbClr val="17324D"/>
+                </a:solidFill>
+                <a:latin typeface="Microsoft YaHei"/>
+              </a:defRPr>
+            </a:pPr>
+            <a:r>
+              <a:t>接口伪代码：复用计算内核，按约定映射与返回</a:t>
+            </a:r>
+          </a:p>
+        </p:txBody>
+      </p:sp>
+      <p:sp>
+        <p:nvSpPr>
+          <p:cNvPr id="5" name="Rectangle 4"/>
+          <p:cNvSpPr/>
+          <p:nvPr/>
+        </p:nvSpPr>
+        <p:spPr>
+          <a:xfrm>
+            <a:off x="548640" y="6446520"/>
+            <a:ext cx="11064240" cy="10972"/>
+          </a:xfrm>
+          <a:prstGeom prst="rect">
+            <a:avLst/>
+          </a:prstGeom>
+          <a:solidFill>
+            <a:srgbClr val="DCE5ED"/>
+          </a:solidFill>
+          <a:ln>
+            <a:noFill/>
+          </a:ln>
+        </p:spPr>
+        <p:style>
+          <a:lnRef idx="1">
+            <a:schemeClr val="accent1"/>
+          </a:lnRef>
+          <a:fillRef idx="3">
+            <a:schemeClr val="accent1"/>
+          </a:fillRef>
+          <a:effectRef idx="2">
+            <a:schemeClr val="accent1"/>
+          </a:effectRef>
+          <a:fontRef idx="minor">
+            <a:schemeClr val="lt1"/>
+          </a:fontRef>
+        </p:style>
+        <p:txBody>
+          <a:bodyPr rtlCol="0" anchor="ctr"/>
+          <a:lstStyle/>
+          <a:p>
+            <a:pPr algn="ctr"/>
+          </a:p>
+        </p:txBody>
+      </p:sp>
+      <p:sp>
+        <p:nvSpPr>
+          <p:cNvPr id="6" name="TextBox 5"/>
+          <p:cNvSpPr txBox="1"/>
+          <p:nvPr/>
+        </p:nvSpPr>
+        <p:spPr>
+          <a:xfrm>
+            <a:off x="548640" y="6537960"/>
+            <a:ext cx="9144000" cy="182880"/>
+          </a:xfrm>
+          <a:prstGeom prst="rect">
+            <a:avLst/>
+          </a:prstGeom>
+          <a:noFill/>
+        </p:spPr>
+        <p:txBody>
+          <a:bodyPr wrap="square" lIns="18288" rIns="18288" tIns="0" bIns="0">
+            <a:spAutoFit/>
+          </a:bodyPr>
+          <a:lstStyle/>
+          <a:p>
+            <a:pPr>
+              <a:spcAft>
+                <a:spcPts val="800"/>
+              </a:spcAft>
+              <a:defRPr sz="900" b="0">
+                <a:solidFill>
+                  <a:srgbClr val="60758A"/>
+                </a:solidFill>
+                <a:latin typeface="Microsoft YaHei"/>
+              </a:defRPr>
+            </a:pPr>
+            <a:r>
+              <a:t>板块二  ·  功能逻辑架构生成研究汇报</a:t>
+            </a:r>
+          </a:p>
+        </p:txBody>
+      </p:sp>
+      <p:sp>
+        <p:nvSpPr>
+          <p:cNvPr id="7" name="TextBox 6"/>
+          <p:cNvSpPr txBox="1"/>
+          <p:nvPr/>
+        </p:nvSpPr>
+        <p:spPr>
+          <a:xfrm>
+            <a:off x="10972800" y="6519672"/>
+            <a:ext cx="640080" cy="228600"/>
+          </a:xfrm>
+          <a:prstGeom prst="rect">
+            <a:avLst/>
+          </a:prstGeom>
+          <a:noFill/>
+        </p:spPr>
+        <p:txBody>
+          <a:bodyPr wrap="square" lIns="18288" rIns="18288" tIns="0" bIns="0">
+            <a:spAutoFit/>
+          </a:bodyPr>
+          <a:lstStyle/>
+          <a:p>
+            <a:pPr algn="r">
+              <a:spcAft>
+                <a:spcPts val="800"/>
+              </a:spcAft>
+              <a:defRPr sz="1000" b="0">
+                <a:solidFill>
+                  <a:srgbClr val="60758A"/>
+                </a:solidFill>
+                <a:latin typeface="Microsoft YaHei"/>
+              </a:defRPr>
+            </a:pPr>
+            <a:r>
+              <a:t>18</a:t>
+            </a:r>
+          </a:p>
+        </p:txBody>
+      </p:sp>
+      <p:sp>
+        <p:nvSpPr>
+          <p:cNvPr id="8" name="Rounded Rectangle 7"/>
+          <p:cNvSpPr/>
+          <p:nvPr/>
+        </p:nvSpPr>
+        <p:spPr>
+          <a:xfrm>
+            <a:off x="594360" y="1691640"/>
+            <a:ext cx="5349240" cy="3611880"/>
+          </a:xfrm>
+          <a:prstGeom prst="roundRect">
+            <a:avLst/>
+          </a:prstGeom>
+          <a:solidFill>
+            <a:srgbClr val="FFFFFF"/>
+          </a:solidFill>
+          <a:ln>
+            <a:noFill/>
+          </a:ln>
+        </p:spPr>
+        <p:style>
+          <a:lnRef idx="1">
+            <a:schemeClr val="accent1"/>
+          </a:lnRef>
+          <a:fillRef idx="3">
+            <a:schemeClr val="accent1"/>
+          </a:fillRef>
+          <a:effectRef idx="2">
+            <a:schemeClr val="accent1"/>
+          </a:effectRef>
+          <a:fontRef idx="minor">
+            <a:schemeClr val="lt1"/>
+          </a:fontRef>
+        </p:style>
+        <p:txBody>
+          <a:bodyPr rtlCol="0" anchor="ctr"/>
+          <a:lstStyle/>
+          <a:p>
+            <a:pPr algn="ctr"/>
+          </a:p>
+        </p:txBody>
+      </p:sp>
+      <p:sp>
+        <p:nvSpPr>
+          <p:cNvPr id="9" name="TextBox 8"/>
+          <p:cNvSpPr txBox="1"/>
+          <p:nvPr/>
+        </p:nvSpPr>
+        <p:spPr>
+          <a:xfrm>
+            <a:off x="777240" y="1874519"/>
+            <a:ext cx="4983480" cy="365760"/>
+          </a:xfrm>
+          <a:prstGeom prst="rect">
+            <a:avLst/>
+          </a:prstGeom>
+          <a:noFill/>
+        </p:spPr>
+        <p:txBody>
+          <a:bodyPr wrap="square" lIns="18288" rIns="18288" tIns="0" bIns="0">
+            <a:spAutoFit/>
+          </a:bodyPr>
+          <a:lstStyle/>
+          <a:p>
+            <a:pPr>
+              <a:spcAft>
+                <a:spcPts val="800"/>
+              </a:spcAft>
+              <a:defRPr sz="2000" b="1">
+                <a:solidFill>
+                  <a:srgbClr val="17324D"/>
+                </a:solidFill>
+                <a:latin typeface="Microsoft YaHei"/>
+              </a:defRPr>
+            </a:pPr>
+            <a:r>
+              <a:t>逻辑架构生成（待接入）</a:t>
+            </a:r>
+          </a:p>
+        </p:txBody>
+      </p:sp>
+      <p:sp>
+        <p:nvSpPr>
+          <p:cNvPr id="10" name="TextBox 9"/>
+          <p:cNvSpPr txBox="1"/>
+          <p:nvPr/>
+        </p:nvSpPr>
+        <p:spPr>
+          <a:xfrm>
+            <a:off x="777240" y="2468880"/>
+            <a:ext cx="4983480" cy="2651760"/>
+          </a:xfrm>
+          <a:prstGeom prst="rect">
+            <a:avLst/>
+          </a:prstGeom>
+          <a:noFill/>
+        </p:spPr>
+        <p:txBody>
+          <a:bodyPr wrap="square" lIns="18288" rIns="18288" tIns="0" bIns="0">
+            <a:spAutoFit/>
+          </a:bodyPr>
+          <a:lstStyle/>
+          <a:p>
+            <a:pPr>
+              <a:spcAft>
+                <a:spcPts val="800"/>
+              </a:spcAft>
+              <a:defRPr sz="1800" b="0">
+                <a:solidFill>
+                  <a:srgbClr val="24384B"/>
+                </a:solidFill>
+                <a:latin typeface="Microsoft YaHei"/>
+              </a:defRPr>
+            </a:pPr>
+            <a:r>
+              <a:t>接收上下文与生成选项</a:t>
+            </a:r>
+          </a:p>
+          <a:p>
+            <a:pPr>
+              <a:spcAft>
+                <a:spcPts val="800"/>
+              </a:spcAft>
+              <a:defRPr sz="1800" b="0">
+                <a:solidFill>
+                  <a:srgbClr val="24384B"/>
+                </a:solidFill>
+                <a:latin typeface="Microsoft YaHei"/>
+              </a:defRPr>
+            </a:pPr>
+            <a:r>
+              <a:t>校验并适配功能点及其关联关系</a:t>
+            </a:r>
+          </a:p>
+          <a:p>
+            <a:pPr>
+              <a:spcAft>
+                <a:spcPts val="800"/>
+              </a:spcAft>
+              <a:defRPr sz="1800" b="0">
+                <a:solidFill>
+                  <a:srgbClr val="24384B"/>
+                </a:solidFill>
+                <a:latin typeface="Microsoft YaHei"/>
+              </a:defRPr>
+            </a:pPr>
+            <a:r>
+              <a:t>调用服务器内部聚类服务</a:t>
+            </a:r>
+          </a:p>
+          <a:p>
+            <a:pPr>
+              <a:spcAft>
+                <a:spcPts val="800"/>
+              </a:spcAft>
+              <a:defRPr sz="1800" b="0">
+                <a:solidFill>
+                  <a:srgbClr val="24384B"/>
+                </a:solidFill>
+                <a:latin typeface="Microsoft YaHei"/>
+              </a:defRPr>
+            </a:pPr>
+            <a:r>
+              <a:t>按cluster_id组织function_id集合</a:t>
+            </a:r>
+          </a:p>
+          <a:p>
+            <a:pPr>
+              <a:spcAft>
+                <a:spcPts val="800"/>
+              </a:spcAft>
+              <a:defRPr sz="1800" b="0">
+                <a:solidFill>
+                  <a:srgbClr val="24384B"/>
+                </a:solidFill>
+                <a:latin typeface="Microsoft YaHei"/>
+              </a:defRPr>
+            </a:pPr>
+            <a:r>
+              <a:t>按双方确认Schema返回JSON</a:t>
+            </a:r>
+          </a:p>
+        </p:txBody>
+      </p:sp>
+      <p:sp>
+        <p:nvSpPr>
+          <p:cNvPr id="11" name="Rounded Rectangle 10"/>
+          <p:cNvSpPr/>
+          <p:nvPr/>
+        </p:nvSpPr>
+        <p:spPr>
+          <a:xfrm>
+            <a:off x="6217920" y="1691640"/>
+            <a:ext cx="5349240" cy="3611880"/>
+          </a:xfrm>
+          <a:prstGeom prst="roundRect">
+            <a:avLst/>
+          </a:prstGeom>
+          <a:solidFill>
+            <a:srgbClr val="FFFFFF"/>
+          </a:solidFill>
+          <a:ln>
+            <a:noFill/>
+          </a:ln>
+        </p:spPr>
+        <p:style>
+          <a:lnRef idx="1">
+            <a:schemeClr val="accent1"/>
+          </a:lnRef>
+          <a:fillRef idx="3">
+            <a:schemeClr val="accent1"/>
+          </a:fillRef>
+          <a:effectRef idx="2">
+            <a:schemeClr val="accent1"/>
+          </a:effectRef>
+          <a:fontRef idx="minor">
+            <a:schemeClr val="lt1"/>
+          </a:fontRef>
+        </p:style>
+        <p:txBody>
+          <a:bodyPr rtlCol="0" anchor="ctr"/>
+          <a:lstStyle/>
+          <a:p>
+            <a:pPr algn="ctr"/>
+          </a:p>
+        </p:txBody>
+      </p:sp>
+      <p:sp>
+        <p:nvSpPr>
+          <p:cNvPr id="12" name="TextBox 11"/>
+          <p:cNvSpPr txBox="1"/>
+          <p:nvPr/>
+        </p:nvSpPr>
+        <p:spPr>
+          <a:xfrm>
+            <a:off x="6400800" y="1874519"/>
+            <a:ext cx="4983480" cy="365760"/>
+          </a:xfrm>
+          <a:prstGeom prst="rect">
+            <a:avLst/>
+          </a:prstGeom>
+          <a:noFill/>
+        </p:spPr>
+        <p:txBody>
+          <a:bodyPr wrap="square" lIns="18288" rIns="18288" tIns="0" bIns="0">
+            <a:spAutoFit/>
+          </a:bodyPr>
+          <a:lstStyle/>
+          <a:p>
+            <a:pPr>
+              <a:spcAft>
+                <a:spcPts val="800"/>
+              </a:spcAft>
+              <a:defRPr sz="2000" b="1">
+                <a:solidFill>
+                  <a:srgbClr val="17324D"/>
+                </a:solidFill>
+                <a:latin typeface="Microsoft YaHei"/>
+              </a:defRPr>
+            </a:pPr>
+            <a:r>
+              <a:t>输入补全（功能设计）</a:t>
+            </a:r>
+          </a:p>
+        </p:txBody>
+      </p:sp>
+      <p:sp>
+        <p:nvSpPr>
+          <p:cNvPr id="13" name="TextBox 12"/>
+          <p:cNvSpPr txBox="1"/>
+          <p:nvPr/>
+        </p:nvSpPr>
+        <p:spPr>
+          <a:xfrm>
+            <a:off x="6400800" y="2468880"/>
+            <a:ext cx="4983480" cy="2651760"/>
+          </a:xfrm>
+          <a:prstGeom prst="rect">
+            <a:avLst/>
+          </a:prstGeom>
+          <a:noFill/>
+        </p:spPr>
+        <p:txBody>
+          <a:bodyPr wrap="square" lIns="18288" rIns="18288" tIns="0" bIns="0">
+            <a:spAutoFit/>
+          </a:bodyPr>
+          <a:lstStyle/>
+          <a:p>
+            <a:pPr>
+              <a:spcAft>
+                <a:spcPts val="800"/>
+              </a:spcAft>
+              <a:defRPr sz="1800" b="0">
+                <a:solidFill>
+                  <a:srgbClr val="24384B"/>
+                </a:solidFill>
+                <a:latin typeface="Microsoft YaHei"/>
+              </a:defRPr>
+            </a:pPr>
+            <a:r>
+              <a:t>接收上下文、用户提示及选项</a:t>
+            </a:r>
+          </a:p>
+          <a:p>
+            <a:pPr>
+              <a:spcAft>
+                <a:spcPts val="800"/>
+              </a:spcAft>
+              <a:defRPr sz="1800" b="0">
+                <a:solidFill>
+                  <a:srgbClr val="24384B"/>
+                </a:solidFill>
+                <a:latin typeface="Microsoft YaHei"/>
+              </a:defRPr>
+            </a:pPr>
+            <a:r>
+              <a:t>若only_check：仅判断完整性并返回</a:t>
+            </a:r>
+          </a:p>
+          <a:p>
+            <a:pPr>
+              <a:spcAft>
+                <a:spcPts val="800"/>
+              </a:spcAft>
+              <a:defRPr sz="1800" b="0">
+                <a:solidFill>
+                  <a:srgbClr val="24384B"/>
+                </a:solidFill>
+                <a:latin typeface="Microsoft YaHei"/>
+              </a:defRPr>
+            </a:pPr>
+            <a:r>
+              <a:t>否则：生成建议并接收用户反馈</a:t>
+            </a:r>
+          </a:p>
+          <a:p>
+            <a:pPr>
+              <a:spcAft>
+                <a:spcPts val="800"/>
+              </a:spcAft>
+              <a:defRPr sz="1800" b="0">
+                <a:solidFill>
+                  <a:srgbClr val="24384B"/>
+                </a:solidFill>
+                <a:latin typeface="Microsoft YaHei"/>
+              </a:defRPr>
+            </a:pPr>
+            <a:r>
+              <a:t>校验合并明确采纳及自行补充内容</a:t>
+            </a:r>
+          </a:p>
+          <a:p>
+            <a:pPr>
+              <a:spcAft>
+                <a:spcPts val="800"/>
+              </a:spcAft>
+              <a:defRPr sz="1800" b="0">
+                <a:solidFill>
+                  <a:srgbClr val="24384B"/>
+                </a:solidFill>
+                <a:latin typeface="Microsoft YaHei"/>
+              </a:defRPr>
+            </a:pPr>
+            <a:r>
+              <a:t>返回新上下文、补全标志及说明</a:t>
+            </a:r>
+          </a:p>
+        </p:txBody>
+      </p:sp>
+      <p:sp>
+        <p:nvSpPr>
+          <p:cNvPr id="14" name="Rounded Rectangle 13"/>
+          <p:cNvSpPr/>
+          <p:nvPr/>
+        </p:nvSpPr>
+        <p:spPr>
+          <a:xfrm>
+            <a:off x="594360" y="5806440"/>
+            <a:ext cx="10972800" cy="429768"/>
+          </a:xfrm>
+          <a:prstGeom prst="roundRect">
+            <a:avLst/>
+          </a:prstGeom>
+          <a:solidFill>
+            <a:srgbClr val="FFF3D9"/>
+          </a:solidFill>
+          <a:ln>
+            <a:noFill/>
+          </a:ln>
+        </p:spPr>
+        <p:style>
+          <a:lnRef idx="1">
+            <a:schemeClr val="accent1"/>
+          </a:lnRef>
+          <a:fillRef idx="3">
+            <a:schemeClr val="accent1"/>
+          </a:fillRef>
+          <a:effectRef idx="2">
+            <a:schemeClr val="accent1"/>
+          </a:effectRef>
+          <a:fontRef idx="minor">
+            <a:schemeClr val="lt1"/>
+          </a:fontRef>
+        </p:style>
+        <p:txBody>
+          <a:bodyPr rtlCol="0" anchor="ctr"/>
+          <a:lstStyle/>
+          <a:p>
+            <a:pPr algn="ctr"/>
+          </a:p>
+        </p:txBody>
+      </p:sp>
+      <p:sp>
+        <p:nvSpPr>
+          <p:cNvPr id="15" name="TextBox 14"/>
+          <p:cNvSpPr txBox="1"/>
+          <p:nvPr/>
+        </p:nvSpPr>
+        <p:spPr>
+          <a:xfrm>
+            <a:off x="777240" y="5888736"/>
+            <a:ext cx="10607040" cy="256032"/>
+          </a:xfrm>
+          <a:prstGeom prst="rect">
+            <a:avLst/>
+          </a:prstGeom>
+          <a:noFill/>
+        </p:spPr>
+        <p:txBody>
+          <a:bodyPr wrap="square" lIns="18288" rIns="18288" tIns="0" bIns="0">
+            <a:spAutoFit/>
+          </a:bodyPr>
+          <a:lstStyle/>
+          <a:p>
+            <a:pPr>
+              <a:spcAft>
+                <a:spcPts val="800"/>
+              </a:spcAft>
+              <a:defRPr sz="1400" b="0">
+                <a:solidFill>
+                  <a:srgbClr val="B67816"/>
+                </a:solidFill>
+                <a:latin typeface="Microsoft YaHei"/>
+              </a:defRPr>
+            </a:pPr>
+            <a:r>
+              <a:t>伪代码表达目标设计；服务器候选确认基础与完整对话补全、only_check需求须分别说明。</a:t>
             </a:r>
           </a:p>
         </p:txBody>
@@ -8478,7 +12397,7 @@
               </a:defRPr>
             </a:pPr>
             <a:r>
-              <a:t>01 / 职责与数据流向</a:t>
+              <a:t>职责与数据流向</a:t>
             </a:r>
           </a:p>
         </p:txBody>
@@ -9577,7 +13496,7 @@
               </a:defRPr>
             </a:pPr>
             <a:r>
-              <a:t>02 / 研究进展</a:t>
+              <a:t>研究进展</a:t>
             </a:r>
           </a:p>
         </p:txBody>
@@ -11157,7 +15076,7 @@
               </a:defRPr>
             </a:pPr>
             <a:r>
-              <a:t>03 / 技术路线</a:t>
+              <a:t>技术路线</a:t>
             </a:r>
           </a:p>
         </p:txBody>
@@ -12413,7 +16332,7 @@
               </a:defRPr>
             </a:pPr>
             <a:r>
-              <a:t>04 / 校验代码与运行证据</a:t>
+              <a:t>校验代码与运行证据</a:t>
             </a:r>
           </a:p>
         </p:txBody>
@@ -12975,7 +16894,7 @@
               </a:defRPr>
             </a:pPr>
             <a:r>
-              <a:t>05 / BIRCH核心代码</a:t>
+              <a:t>BIRCH核心代码</a:t>
             </a:r>
           </a:p>
         </p:txBody>
@@ -13431,7 +17350,7 @@
               </a:defRPr>
             </a:pPr>
             <a:r>
-              <a:t>06 / 拓扑连接核心代码</a:t>
+              <a:t>拓扑连接核心代码</a:t>
             </a:r>
           </a:p>
         </p:txBody>
@@ -13591,7 +17510,7 @@
               </a:defRPr>
             </a:pPr>
             <a:r>
-              <a:t>07</a:t>
+              <a:t>10</a:t>
             </a:r>
           </a:p>
         </p:txBody>
@@ -13993,7 +17912,7 @@
               </a:defRPr>
             </a:pPr>
             <a:r>
-              <a:t>07 / 运行结果</a:t>
+              <a:t>运行结果</a:t>
             </a:r>
           </a:p>
         </p:txBody>
@@ -14153,7 +18072,7 @@
               </a:defRPr>
             </a:pPr>
             <a:r>
-              <a:t>08</a:t>
+              <a:t>07</a:t>
             </a:r>
           </a:p>
         </p:txBody>
@@ -14722,7 +18641,7 @@
               </a:defRPr>
             </a:pPr>
             <a:r>
-              <a:t>08 / 数据输出</a:t>
+              <a:t>数据输出</a:t>
             </a:r>
           </a:p>
         </p:txBody>
@@ -14882,7 +18801,7 @@
               </a:defRPr>
             </a:pPr>
             <a:r>
-              <a:t>09</a:t>
+              <a:t>15</a:t>
             </a:r>
           </a:p>
         </p:txBody>
